--- a/automation/ecoco_客服週報_第33週_0810~0816.pptx
+++ b/automation/ecoco_客服週報_第33週_0810~0816.pptx
@@ -1250,7 +1250,7 @@
       </p:sp>
       <p:pic>
         <p:nvPicPr>
-          <p:cNvPr id="8" name="Image 0" descr="/home/claude/work/icons/headset_blue.png">    </p:cNvPr>
+          <p:cNvPr id="8" name="Image 0" descr="D:\info\0507_Weekly-Report\Operations-Weekly-Report\automation\icons\headset_blue.png">    </p:cNvPr>
           <p:cNvPicPr>
             <a:picLocks noChangeAspect="1"/>
           </p:cNvPicPr>
@@ -1525,7 +1525,7 @@
       </p:sp>
       <p:pic>
         <p:nvPicPr>
-          <p:cNvPr id="16" name="Image 1" descr="/home/claude/work/icons/warn_orange.png">    </p:cNvPr>
+          <p:cNvPr id="16" name="Image 1" descr="D:\info\0507_Weekly-Report\Operations-Weekly-Report\automation\icons\warn_orange.png">    </p:cNvPr>
           <p:cNvPicPr>
             <a:picLocks noChangeAspect="1"/>
           </p:cNvPicPr>
@@ -1786,7 +1786,7 @@
       </p:sp>
       <p:pic>
         <p:nvPicPr>
-          <p:cNvPr id="24" name="Image 2" descr="/home/claude/work/icons/pin_darkblue.png">    </p:cNvPr>
+          <p:cNvPr id="24" name="Image 2" descr="D:\info\0507_Weekly-Report\Operations-Weekly-Report\automation\icons\pin_darkblue.png">    </p:cNvPr>
           <p:cNvPicPr>
             <a:picLocks noChangeAspect="1"/>
           </p:cNvPicPr>
@@ -2047,7 +2047,7 @@
       </p:sp>
       <p:pic>
         <p:nvPicPr>
-          <p:cNvPr id="32" name="Image 3" descr="/home/claude/work/icons/usercog_gold.png">    </p:cNvPr>
+          <p:cNvPr id="32" name="Image 3" descr="D:\info\0507_Weekly-Report\Operations-Weekly-Report\automation\icons\usercog_gold.png">    </p:cNvPr>
           <p:cNvPicPr>
             <a:picLocks noChangeAspect="1"/>
           </p:cNvPicPr>
@@ -6246,7 +6246,7 @@
       </p:sp>
       <p:pic>
         <p:nvPicPr>
-          <p:cNvPr id="7" name="Image 0" descr="/home/claude/work/icons/recycle_blue.png">    </p:cNvPr>
+          <p:cNvPr id="7" name="Image 0" descr="D:\info\0507_Weekly-Report\Operations-Weekly-Report\automation\icons\recycle_blue.png">    </p:cNvPr>
           <p:cNvPicPr>
             <a:picLocks noChangeAspect="1"/>
           </p:cNvPicPr>
@@ -6484,7 +6484,7 @@
       </p:sp>
       <p:pic>
         <p:nvPicPr>
-          <p:cNvPr id="14" name="Image 1" descr="/home/claude/work/icons/pin_gray.png">    </p:cNvPr>
+          <p:cNvPr id="14" name="Image 1" descr="D:\info\0507_Weekly-Report\Operations-Weekly-Report\automation\icons\pin_gray.png">    </p:cNvPr>
           <p:cNvPicPr>
             <a:picLocks noChangeAspect="1"/>
           </p:cNvPicPr>
@@ -6661,7 +6661,7 @@
       </p:sp>
       <p:pic>
         <p:nvPicPr>
-          <p:cNvPr id="19" name="Image 2" descr="/home/claude/work/icons/pin_gray.png">    </p:cNvPr>
+          <p:cNvPr id="19" name="Image 2" descr="D:\info\0507_Weekly-Report\Operations-Weekly-Report\automation\icons\pin_gray.png">    </p:cNvPr>
           <p:cNvPicPr>
             <a:picLocks noChangeAspect="1"/>
           </p:cNvPicPr>
@@ -6838,7 +6838,7 @@
       </p:sp>
       <p:pic>
         <p:nvPicPr>
-          <p:cNvPr id="24" name="Image 3" descr="/home/claude/work/icons/pin_gray.png">    </p:cNvPr>
+          <p:cNvPr id="24" name="Image 3" descr="D:\info\0507_Weekly-Report\Operations-Weekly-Report\automation\icons\pin_gray.png">    </p:cNvPr>
           <p:cNvPicPr>
             <a:picLocks noChangeAspect="1"/>
           </p:cNvPicPr>
@@ -6935,7 +6935,7 @@
       </p:sp>
       <p:pic>
         <p:nvPicPr>
-          <p:cNvPr id="27" name="Image 4" descr="/home/claude/work/icons/battery_orange.png">    </p:cNvPr>
+          <p:cNvPr id="27" name="Image 4" descr="D:\info\0507_Weekly-Report\Operations-Weekly-Report\automation\icons\battery_orange.png">    </p:cNvPr>
           <p:cNvPicPr>
             <a:picLocks noChangeAspect="1"/>
           </p:cNvPicPr>
@@ -7173,7 +7173,7 @@
       </p:sp>
       <p:pic>
         <p:nvPicPr>
-          <p:cNvPr id="34" name="Image 5" descr="/home/claude/work/icons/pin_gray.png">    </p:cNvPr>
+          <p:cNvPr id="34" name="Image 5" descr="D:\info\0507_Weekly-Report\Operations-Weekly-Report\automation\icons\pin_gray.png">    </p:cNvPr>
           <p:cNvPicPr>
             <a:picLocks noChangeAspect="1"/>
           </p:cNvPicPr>
@@ -7350,7 +7350,7 @@
       </p:sp>
       <p:pic>
         <p:nvPicPr>
-          <p:cNvPr id="39" name="Image 6" descr="/home/claude/work/icons/pin_gray.png">    </p:cNvPr>
+          <p:cNvPr id="39" name="Image 6" descr="D:\info\0507_Weekly-Report\Operations-Weekly-Report\automation\icons\pin_gray.png">    </p:cNvPr>
           <p:cNvPicPr>
             <a:picLocks noChangeAspect="1"/>
           </p:cNvPicPr>
@@ -7527,7 +7527,7 @@
       </p:sp>
       <p:pic>
         <p:nvPicPr>
-          <p:cNvPr id="44" name="Image 7" descr="/home/claude/work/icons/pin_gray.png">    </p:cNvPr>
+          <p:cNvPr id="44" name="Image 7" descr="D:\info\0507_Weekly-Report\Operations-Weekly-Report\automation\icons\pin_gray.png">    </p:cNvPr>
           <p:cNvPicPr>
             <a:picLocks noChangeAspect="1"/>
           </p:cNvPicPr>
@@ -7617,7 +7617,7 @@
       </p:sp>
       <p:pic>
         <p:nvPicPr>
-          <p:cNvPr id="47" name="Image 8" descr="/home/claude/work/icons/warn.png">    </p:cNvPr>
+          <p:cNvPr id="47" name="Image 8" descr="D:\info\0507_Weekly-Report\Operations-Weekly-Report\automation\icons\warn.png">    </p:cNvPr>
           <p:cNvPicPr>
             <a:picLocks noChangeAspect="1"/>
           </p:cNvPicPr>
@@ -8465,7 +8465,7 @@
                           <a:ea typeface="Noto Sans TC Medium" pitchFamily="34" charset="-122"/>
                           <a:cs typeface="Noto Sans TC Medium" pitchFamily="34" charset="-120"/>
                         </a:rPr>
-                        <a:t>高雄</a:t>
+                        <a:t>臺南</a:t>
                       </a:r>
                       <a:endParaRPr lang="en-US" sz="1100" dirty="0">
                         <a:latin typeface="Noto Sans TC Medium" charset="0"/>
@@ -8533,7 +8533,7 @@
                           <a:ea typeface="Noto Sans TC Bold" pitchFamily="34" charset="-122"/>
                           <a:cs typeface="Noto Sans TC Bold" pitchFamily="34" charset="-120"/>
                         </a:rPr>
-                        <a:t>全聯福利中心小港宏平店站</a:t>
+                        <a:t>全聯福利中心官田中山店站</a:t>
                       </a:r>
                       <a:endParaRPr lang="en-US" sz="1150" dirty="0">
                         <a:latin typeface="Noto Sans TC Bold" charset="0"/>
@@ -8601,7 +8601,7 @@
                           <a:ea typeface="Noto Sans TC Bold" pitchFamily="34" charset="-122"/>
                           <a:cs typeface="Noto Sans TC Bold" pitchFamily="34" charset="-120"/>
                         </a:rPr>
-                        <a:t>20</a:t>
+                        <a:t>1,906</a:t>
                       </a:r>
                       <a:endParaRPr lang="en-US" sz="1200" dirty="0">
                         <a:latin typeface="Noto Sans TC Bold" charset="0"/>
@@ -8807,7 +8807,7 @@
                           <a:ea typeface="Noto Sans TC Medium" pitchFamily="34" charset="-122"/>
                           <a:cs typeface="Noto Sans TC Medium" pitchFamily="34" charset="-120"/>
                         </a:rPr>
-                        <a:t>第 525 名</a:t>
+                        <a:t>第 510 名</a:t>
                       </a:r>
                       <a:endParaRPr lang="en-US" sz="1050" dirty="0">
                         <a:latin typeface="Noto Sans TC Medium" charset="0"/>
@@ -8943,7 +8943,7 @@
                           <a:ea typeface="Noto Sans TC Bold" pitchFamily="34" charset="-122"/>
                           <a:cs typeface="Noto Sans TC Bold" pitchFamily="34" charset="-120"/>
                         </a:rPr>
-                        <a:t>特力屋大順店站</a:t>
+                        <a:t>全聯福利中心湖內中山店站</a:t>
                       </a:r>
                       <a:endParaRPr lang="en-US" sz="1150" dirty="0">
                         <a:latin typeface="Noto Sans TC Bold" charset="0"/>
@@ -9011,7 +9011,7 @@
                           <a:ea typeface="Noto Sans TC Bold" pitchFamily="34" charset="-122"/>
                           <a:cs typeface="Noto Sans TC Bold" pitchFamily="34" charset="-120"/>
                         </a:rPr>
-                        <a:t>277</a:t>
+                        <a:t>2,710</a:t>
                       </a:r>
                       <a:endParaRPr lang="en-US" sz="1200" dirty="0">
                         <a:latin typeface="Noto Sans TC Bold" charset="0"/>
@@ -9217,7 +9217,1647 @@
                           <a:ea typeface="Noto Sans TC Medium" pitchFamily="34" charset="-122"/>
                           <a:cs typeface="Noto Sans TC Medium" pitchFamily="34" charset="-120"/>
                         </a:rPr>
-                        <a:t>第 524 名</a:t>
+                        <a:t>第 506 名</a:t>
+                      </a:r>
+                      <a:endParaRPr lang="en-US" sz="1050" dirty="0">
+                        <a:latin typeface="Noto Sans TC Medium" charset="0"/>
+                        <a:ea typeface="Noto Sans TC Medium" charset="0"/>
+                        <a:cs typeface="Noto Sans TC Medium" charset="0"/>
+                      </a:endParaRPr>
+                    </a:p>
+                  </a:txBody>
+                  <a:tcPr marL="91440" marR="91440" marT="45720" marB="45720" anchor="ctr">
+                    <a:lnL w="6350" cap="flat" cmpd="sng" algn="ctr">
+                      <a:solidFill>
+                        <a:srgbClr val="E5E5E5"/>
+                      </a:solidFill>
+                      <a:prstDash val="solid"/>
+                      <a:round/>
+                      <a:headEnd type="none" w="med" len="med"/>
+                      <a:tailEnd type="none" w="med" len="med"/>
+                    </a:lnL>
+                    <a:lnR w="6350" cap="flat" cmpd="sng" algn="ctr">
+                      <a:solidFill>
+                        <a:srgbClr val="E5E5E5"/>
+                      </a:solidFill>
+                      <a:prstDash val="solid"/>
+                      <a:round/>
+                      <a:headEnd type="none" w="med" len="med"/>
+                      <a:tailEnd type="none" w="med" len="med"/>
+                    </a:lnR>
+                    <a:lnT w="6350" cap="flat" cmpd="sng" algn="ctr">
+                      <a:solidFill>
+                        <a:srgbClr val="E5E5E5"/>
+                      </a:solidFill>
+                      <a:prstDash val="solid"/>
+                      <a:round/>
+                      <a:headEnd type="none" w="med" len="med"/>
+                      <a:tailEnd type="none" w="med" len="med"/>
+                    </a:lnT>
+                    <a:lnB w="6350" cap="flat" cmpd="sng" algn="ctr">
+                      <a:solidFill>
+                        <a:srgbClr val="E5E5E5"/>
+                      </a:solidFill>
+                      <a:prstDash val="solid"/>
+                      <a:round/>
+                      <a:headEnd type="none" w="med" len="med"/>
+                      <a:tailEnd type="none" w="med" len="med"/>
+                    </a:lnB>
+                    <a:solidFill>
+                      <a:srgbClr val="FFFFFF"/>
+                    </a:solidFill>
+                  </a:tcPr>
+                </a:tc>
+                <a:tc>
+                  <a:txBody>
+                    <a:bodyPr/>
+                    <a:lstStyle/>
+                    <a:p>
+                      <a:pPr algn="ctr" indent="0" marL="0">
+                        <a:buNone/>
+                      </a:pPr>
+                      <a:r>
+                        <a:rPr lang="en-US" sz="1100" dirty="0">
+                          <a:solidFill>
+                            <a:srgbClr val="333333"/>
+                          </a:solidFill>
+                          <a:latin typeface="Noto Sans TC Medium" pitchFamily="34" charset="0"/>
+                          <a:ea typeface="Noto Sans TC Medium" pitchFamily="34" charset="-122"/>
+                          <a:cs typeface="Noto Sans TC Medium" pitchFamily="34" charset="-120"/>
+                        </a:rPr>
+                        <a:t>高雄</a:t>
+                      </a:r>
+                      <a:endParaRPr lang="en-US" sz="1100" dirty="0">
+                        <a:latin typeface="Noto Sans TC Medium" charset="0"/>
+                        <a:ea typeface="Noto Sans TC Medium" charset="0"/>
+                        <a:cs typeface="Noto Sans TC Medium" charset="0"/>
+                      </a:endParaRPr>
+                    </a:p>
+                  </a:txBody>
+                  <a:tcPr marL="91440" marR="91440" marT="45720" marB="45720" anchor="ctr">
+                    <a:lnL w="6350" cap="flat" cmpd="sng" algn="ctr">
+                      <a:solidFill>
+                        <a:srgbClr val="E5E5E5"/>
+                      </a:solidFill>
+                      <a:prstDash val="solid"/>
+                      <a:round/>
+                      <a:headEnd type="none" w="med" len="med"/>
+                      <a:tailEnd type="none" w="med" len="med"/>
+                    </a:lnL>
+                    <a:lnR w="6350" cap="flat" cmpd="sng" algn="ctr">
+                      <a:solidFill>
+                        <a:srgbClr val="E5E5E5"/>
+                      </a:solidFill>
+                      <a:prstDash val="solid"/>
+                      <a:round/>
+                      <a:headEnd type="none" w="med" len="med"/>
+                      <a:tailEnd type="none" w="med" len="med"/>
+                    </a:lnR>
+                    <a:lnT w="6350" cap="flat" cmpd="sng" algn="ctr">
+                      <a:solidFill>
+                        <a:srgbClr val="E5E5E5"/>
+                      </a:solidFill>
+                      <a:prstDash val="solid"/>
+                      <a:round/>
+                      <a:headEnd type="none" w="med" len="med"/>
+                      <a:tailEnd type="none" w="med" len="med"/>
+                    </a:lnT>
+                    <a:lnB w="6350" cap="flat" cmpd="sng" algn="ctr">
+                      <a:solidFill>
+                        <a:srgbClr val="E5E5E5"/>
+                      </a:solidFill>
+                      <a:prstDash val="solid"/>
+                      <a:round/>
+                      <a:headEnd type="none" w="med" len="med"/>
+                      <a:tailEnd type="none" w="med" len="med"/>
+                    </a:lnB>
+                    <a:solidFill>
+                      <a:srgbClr val="FFFFFF"/>
+                    </a:solidFill>
+                  </a:tcPr>
+                </a:tc>
+                <a:tc>
+                  <a:txBody>
+                    <a:bodyPr/>
+                    <a:lstStyle/>
+                    <a:p>
+                      <a:pPr algn="l" indent="0" marL="0">
+                        <a:buNone/>
+                      </a:pPr>
+                      <a:r>
+                        <a:rPr lang="en-US" sz="1150" b="1" dirty="0">
+                          <a:solidFill>
+                            <a:srgbClr val="333333"/>
+                          </a:solidFill>
+                          <a:latin typeface="Noto Sans TC Bold" pitchFamily="34" charset="0"/>
+                          <a:ea typeface="Noto Sans TC Bold" pitchFamily="34" charset="-122"/>
+                          <a:cs typeface="Noto Sans TC Bold" pitchFamily="34" charset="-120"/>
+                        </a:rPr>
+                        <a:t>小北百貨高雄鳳林店站</a:t>
+                      </a:r>
+                      <a:endParaRPr lang="en-US" sz="1150" dirty="0">
+                        <a:latin typeface="Noto Sans TC Bold" charset="0"/>
+                        <a:ea typeface="Noto Sans TC Bold" charset="0"/>
+                        <a:cs typeface="Noto Sans TC Bold" charset="0"/>
+                      </a:endParaRPr>
+                    </a:p>
+                  </a:txBody>
+                  <a:tcPr marL="91440" marR="91440" marT="45720" marB="45720" anchor="ctr">
+                    <a:lnL w="6350" cap="flat" cmpd="sng" algn="ctr">
+                      <a:solidFill>
+                        <a:srgbClr val="E5E5E5"/>
+                      </a:solidFill>
+                      <a:prstDash val="solid"/>
+                      <a:round/>
+                      <a:headEnd type="none" w="med" len="med"/>
+                      <a:tailEnd type="none" w="med" len="med"/>
+                    </a:lnL>
+                    <a:lnR w="6350" cap="flat" cmpd="sng" algn="ctr">
+                      <a:solidFill>
+                        <a:srgbClr val="E5E5E5"/>
+                      </a:solidFill>
+                      <a:prstDash val="solid"/>
+                      <a:round/>
+                      <a:headEnd type="none" w="med" len="med"/>
+                      <a:tailEnd type="none" w="med" len="med"/>
+                    </a:lnR>
+                    <a:lnT w="6350" cap="flat" cmpd="sng" algn="ctr">
+                      <a:solidFill>
+                        <a:srgbClr val="E5E5E5"/>
+                      </a:solidFill>
+                      <a:prstDash val="solid"/>
+                      <a:round/>
+                      <a:headEnd type="none" w="med" len="med"/>
+                      <a:tailEnd type="none" w="med" len="med"/>
+                    </a:lnT>
+                    <a:lnB w="6350" cap="flat" cmpd="sng" algn="ctr">
+                      <a:solidFill>
+                        <a:srgbClr val="E5E5E5"/>
+                      </a:solidFill>
+                      <a:prstDash val="solid"/>
+                      <a:round/>
+                      <a:headEnd type="none" w="med" len="med"/>
+                      <a:tailEnd type="none" w="med" len="med"/>
+                    </a:lnB>
+                    <a:solidFill>
+                      <a:srgbClr val="FFFFFF"/>
+                    </a:solidFill>
+                  </a:tcPr>
+                </a:tc>
+                <a:tc>
+                  <a:txBody>
+                    <a:bodyPr/>
+                    <a:lstStyle/>
+                    <a:p>
+                      <a:pPr algn="ctr" indent="0" marL="0">
+                        <a:buNone/>
+                      </a:pPr>
+                      <a:r>
+                        <a:rPr lang="en-US" sz="1200" b="1" dirty="0">
+                          <a:solidFill>
+                            <a:srgbClr val="0076A9"/>
+                          </a:solidFill>
+                          <a:latin typeface="Noto Sans TC Bold" pitchFamily="34" charset="0"/>
+                          <a:ea typeface="Noto Sans TC Bold" pitchFamily="34" charset="-122"/>
+                          <a:cs typeface="Noto Sans TC Bold" pitchFamily="34" charset="-120"/>
+                        </a:rPr>
+                        <a:t>2,914</a:t>
+                      </a:r>
+                      <a:endParaRPr lang="en-US" sz="1200" dirty="0">
+                        <a:latin typeface="Noto Sans TC Bold" charset="0"/>
+                        <a:ea typeface="Noto Sans TC Bold" charset="0"/>
+                        <a:cs typeface="Noto Sans TC Bold" charset="0"/>
+                      </a:endParaRPr>
+                    </a:p>
+                  </a:txBody>
+                  <a:tcPr marL="91440" marR="91440" marT="45720" marB="45720" anchor="ctr">
+                    <a:lnL w="6350" cap="flat" cmpd="sng" algn="ctr">
+                      <a:solidFill>
+                        <a:srgbClr val="E5E5E5"/>
+                      </a:solidFill>
+                      <a:prstDash val="solid"/>
+                      <a:round/>
+                      <a:headEnd type="none" w="med" len="med"/>
+                      <a:tailEnd type="none" w="med" len="med"/>
+                    </a:lnL>
+                    <a:lnR w="6350" cap="flat" cmpd="sng" algn="ctr">
+                      <a:solidFill>
+                        <a:srgbClr val="E5E5E5"/>
+                      </a:solidFill>
+                      <a:prstDash val="solid"/>
+                      <a:round/>
+                      <a:headEnd type="none" w="med" len="med"/>
+                      <a:tailEnd type="none" w="med" len="med"/>
+                    </a:lnR>
+                    <a:lnT w="6350" cap="flat" cmpd="sng" algn="ctr">
+                      <a:solidFill>
+                        <a:srgbClr val="E5E5E5"/>
+                      </a:solidFill>
+                      <a:prstDash val="solid"/>
+                      <a:round/>
+                      <a:headEnd type="none" w="med" len="med"/>
+                      <a:tailEnd type="none" w="med" len="med"/>
+                    </a:lnT>
+                    <a:lnB w="6350" cap="flat" cmpd="sng" algn="ctr">
+                      <a:solidFill>
+                        <a:srgbClr val="E5E5E5"/>
+                      </a:solidFill>
+                      <a:prstDash val="solid"/>
+                      <a:round/>
+                      <a:headEnd type="none" w="med" len="med"/>
+                      <a:tailEnd type="none" w="med" len="med"/>
+                    </a:lnB>
+                    <a:solidFill>
+                      <a:srgbClr val="FFFFFF"/>
+                    </a:solidFill>
+                  </a:tcPr>
+                </a:tc>
+                <a:tc>
+                  <a:txBody>
+                    <a:bodyPr/>
+                    <a:lstStyle/>
+                    <a:p>
+                      <a:pPr algn="ctr" indent="0" marL="0">
+                        <a:buNone/>
+                      </a:pPr>
+                      <a:r>
+                        <a:rPr lang="en-US" sz="950" dirty="0">
+                          <a:solidFill>
+                            <a:srgbClr val="888888"/>
+                          </a:solidFill>
+                          <a:latin typeface="Noto Sans TC Medium" pitchFamily="34" charset="0"/>
+                          <a:ea typeface="Noto Sans TC Medium" pitchFamily="34" charset="-122"/>
+                          <a:cs typeface="Noto Sans TC Medium" pitchFamily="34" charset="-120"/>
+                        </a:rPr>
+                        <a:t>－（首次記錄）</a:t>
+                      </a:r>
+                      <a:endParaRPr lang="en-US" sz="950" dirty="0">
+                        <a:latin typeface="Noto Sans TC Medium" charset="0"/>
+                        <a:ea typeface="Noto Sans TC Medium" charset="0"/>
+                        <a:cs typeface="Noto Sans TC Medium" charset="0"/>
+                      </a:endParaRPr>
+                    </a:p>
+                  </a:txBody>
+                  <a:tcPr marL="91440" marR="91440" marT="45720" marB="45720" anchor="ctr">
+                    <a:lnL w="6350" cap="flat" cmpd="sng" algn="ctr">
+                      <a:solidFill>
+                        <a:srgbClr val="E5E5E5"/>
+                      </a:solidFill>
+                      <a:prstDash val="solid"/>
+                      <a:round/>
+                      <a:headEnd type="none" w="med" len="med"/>
+                      <a:tailEnd type="none" w="med" len="med"/>
+                    </a:lnL>
+                    <a:lnR w="6350" cap="flat" cmpd="sng" algn="ctr">
+                      <a:solidFill>
+                        <a:srgbClr val="E5E5E5"/>
+                      </a:solidFill>
+                      <a:prstDash val="solid"/>
+                      <a:round/>
+                      <a:headEnd type="none" w="med" len="med"/>
+                      <a:tailEnd type="none" w="med" len="med"/>
+                    </a:lnR>
+                    <a:lnT w="6350" cap="flat" cmpd="sng" algn="ctr">
+                      <a:solidFill>
+                        <a:srgbClr val="E5E5E5"/>
+                      </a:solidFill>
+                      <a:prstDash val="solid"/>
+                      <a:round/>
+                      <a:headEnd type="none" w="med" len="med"/>
+                      <a:tailEnd type="none" w="med" len="med"/>
+                    </a:lnT>
+                    <a:lnB w="6350" cap="flat" cmpd="sng" algn="ctr">
+                      <a:solidFill>
+                        <a:srgbClr val="E5E5E5"/>
+                      </a:solidFill>
+                      <a:prstDash val="solid"/>
+                      <a:round/>
+                      <a:headEnd type="none" w="med" len="med"/>
+                      <a:tailEnd type="none" w="med" len="med"/>
+                    </a:lnB>
+                    <a:solidFill>
+                      <a:srgbClr val="FFFFFF"/>
+                    </a:solidFill>
+                  </a:tcPr>
+                </a:tc>
+              </a:tr>
+              <a:tr h="384048">
+                <a:tc>
+                  <a:txBody>
+                    <a:bodyPr/>
+                    <a:lstStyle/>
+                    <a:p>
+                      <a:pPr algn="ctr" indent="0" marL="0">
+                        <a:buNone/>
+                      </a:pPr>
+                      <a:r>
+                        <a:rPr lang="en-US" sz="1400" b="1" dirty="0">
+                          <a:solidFill>
+                            <a:srgbClr val="888888"/>
+                          </a:solidFill>
+                          <a:latin typeface="Noto Sans TC Black" pitchFamily="34" charset="0"/>
+                          <a:ea typeface="Noto Sans TC Black" pitchFamily="34" charset="-122"/>
+                          <a:cs typeface="Noto Sans TC Black" pitchFamily="34" charset="-120"/>
+                        </a:rPr>
+                        <a:t>C</a:t>
+                      </a:r>
+                      <a:endParaRPr lang="en-US" sz="1400" dirty="0">
+                        <a:latin typeface="Noto Sans TC Black" charset="0"/>
+                        <a:ea typeface="Noto Sans TC Black" charset="0"/>
+                        <a:cs typeface="Noto Sans TC Black" charset="0"/>
+                      </a:endParaRPr>
+                    </a:p>
+                  </a:txBody>
+                  <a:tcPr marL="91440" marR="91440" marT="45720" marB="45720" anchor="ctr">
+                    <a:lnL w="6350" cap="flat" cmpd="sng" algn="ctr">
+                      <a:solidFill>
+                        <a:srgbClr val="E5E5E5"/>
+                      </a:solidFill>
+                      <a:prstDash val="solid"/>
+                      <a:round/>
+                      <a:headEnd type="none" w="med" len="med"/>
+                      <a:tailEnd type="none" w="med" len="med"/>
+                    </a:lnL>
+                    <a:lnR w="6350" cap="flat" cmpd="sng" algn="ctr">
+                      <a:solidFill>
+                        <a:srgbClr val="E5E5E5"/>
+                      </a:solidFill>
+                      <a:prstDash val="solid"/>
+                      <a:round/>
+                      <a:headEnd type="none" w="med" len="med"/>
+                      <a:tailEnd type="none" w="med" len="med"/>
+                    </a:lnR>
+                    <a:lnT w="6350" cap="flat" cmpd="sng" algn="ctr">
+                      <a:solidFill>
+                        <a:srgbClr val="E5E5E5"/>
+                      </a:solidFill>
+                      <a:prstDash val="solid"/>
+                      <a:round/>
+                      <a:headEnd type="none" w="med" len="med"/>
+                      <a:tailEnd type="none" w="med" len="med"/>
+                    </a:lnT>
+                    <a:lnB w="6350" cap="flat" cmpd="sng" algn="ctr">
+                      <a:solidFill>
+                        <a:srgbClr val="E5E5E5"/>
+                      </a:solidFill>
+                      <a:prstDash val="solid"/>
+                      <a:round/>
+                      <a:headEnd type="none" w="med" len="med"/>
+                      <a:tailEnd type="none" w="med" len="med"/>
+                    </a:lnB>
+                    <a:solidFill>
+                      <a:srgbClr val="F7F7F9"/>
+                    </a:solidFill>
+                  </a:tcPr>
+                </a:tc>
+                <a:tc>
+                  <a:txBody>
+                    <a:bodyPr/>
+                    <a:lstStyle/>
+                    <a:p>
+                      <a:pPr algn="ctr" indent="0" marL="0">
+                        <a:buNone/>
+                      </a:pPr>
+                      <a:r>
+                        <a:rPr lang="en-US" sz="1050" dirty="0">
+                          <a:solidFill>
+                            <a:srgbClr val="888888"/>
+                          </a:solidFill>
+                          <a:latin typeface="Noto Sans TC Medium" pitchFamily="34" charset="0"/>
+                          <a:ea typeface="Noto Sans TC Medium" pitchFamily="34" charset="-122"/>
+                          <a:cs typeface="Noto Sans TC Medium" pitchFamily="34" charset="-120"/>
+                        </a:rPr>
+                        <a:t>第 505 名</a:t>
+                      </a:r>
+                      <a:endParaRPr lang="en-US" sz="1050" dirty="0">
+                        <a:latin typeface="Noto Sans TC Medium" charset="0"/>
+                        <a:ea typeface="Noto Sans TC Medium" charset="0"/>
+                        <a:cs typeface="Noto Sans TC Medium" charset="0"/>
+                      </a:endParaRPr>
+                    </a:p>
+                  </a:txBody>
+                  <a:tcPr marL="91440" marR="91440" marT="45720" marB="45720" anchor="ctr">
+                    <a:lnL w="6350" cap="flat" cmpd="sng" algn="ctr">
+                      <a:solidFill>
+                        <a:srgbClr val="E5E5E5"/>
+                      </a:solidFill>
+                      <a:prstDash val="solid"/>
+                      <a:round/>
+                      <a:headEnd type="none" w="med" len="med"/>
+                      <a:tailEnd type="none" w="med" len="med"/>
+                    </a:lnL>
+                    <a:lnR w="6350" cap="flat" cmpd="sng" algn="ctr">
+                      <a:solidFill>
+                        <a:srgbClr val="E5E5E5"/>
+                      </a:solidFill>
+                      <a:prstDash val="solid"/>
+                      <a:round/>
+                      <a:headEnd type="none" w="med" len="med"/>
+                      <a:tailEnd type="none" w="med" len="med"/>
+                    </a:lnR>
+                    <a:lnT w="6350" cap="flat" cmpd="sng" algn="ctr">
+                      <a:solidFill>
+                        <a:srgbClr val="E5E5E5"/>
+                      </a:solidFill>
+                      <a:prstDash val="solid"/>
+                      <a:round/>
+                      <a:headEnd type="none" w="med" len="med"/>
+                      <a:tailEnd type="none" w="med" len="med"/>
+                    </a:lnT>
+                    <a:lnB w="6350" cap="flat" cmpd="sng" algn="ctr">
+                      <a:solidFill>
+                        <a:srgbClr val="E5E5E5"/>
+                      </a:solidFill>
+                      <a:prstDash val="solid"/>
+                      <a:round/>
+                      <a:headEnd type="none" w="med" len="med"/>
+                      <a:tailEnd type="none" w="med" len="med"/>
+                    </a:lnB>
+                    <a:solidFill>
+                      <a:srgbClr val="F7F7F9"/>
+                    </a:solidFill>
+                  </a:tcPr>
+                </a:tc>
+                <a:tc>
+                  <a:txBody>
+                    <a:bodyPr/>
+                    <a:lstStyle/>
+                    <a:p>
+                      <a:pPr algn="ctr" indent="0" marL="0">
+                        <a:buNone/>
+                      </a:pPr>
+                      <a:r>
+                        <a:rPr lang="en-US" sz="1100" dirty="0">
+                          <a:solidFill>
+                            <a:srgbClr val="333333"/>
+                          </a:solidFill>
+                          <a:latin typeface="Noto Sans TC Medium" pitchFamily="34" charset="0"/>
+                          <a:ea typeface="Noto Sans TC Medium" pitchFamily="34" charset="-122"/>
+                          <a:cs typeface="Noto Sans TC Medium" pitchFamily="34" charset="-120"/>
+                        </a:rPr>
+                        <a:t>彰化</a:t>
+                      </a:r>
+                      <a:endParaRPr lang="en-US" sz="1100" dirty="0">
+                        <a:latin typeface="Noto Sans TC Medium" charset="0"/>
+                        <a:ea typeface="Noto Sans TC Medium" charset="0"/>
+                        <a:cs typeface="Noto Sans TC Medium" charset="0"/>
+                      </a:endParaRPr>
+                    </a:p>
+                  </a:txBody>
+                  <a:tcPr marL="91440" marR="91440" marT="45720" marB="45720" anchor="ctr">
+                    <a:lnL w="6350" cap="flat" cmpd="sng" algn="ctr">
+                      <a:solidFill>
+                        <a:srgbClr val="E5E5E5"/>
+                      </a:solidFill>
+                      <a:prstDash val="solid"/>
+                      <a:round/>
+                      <a:headEnd type="none" w="med" len="med"/>
+                      <a:tailEnd type="none" w="med" len="med"/>
+                    </a:lnL>
+                    <a:lnR w="6350" cap="flat" cmpd="sng" algn="ctr">
+                      <a:solidFill>
+                        <a:srgbClr val="E5E5E5"/>
+                      </a:solidFill>
+                      <a:prstDash val="solid"/>
+                      <a:round/>
+                      <a:headEnd type="none" w="med" len="med"/>
+                      <a:tailEnd type="none" w="med" len="med"/>
+                    </a:lnR>
+                    <a:lnT w="6350" cap="flat" cmpd="sng" algn="ctr">
+                      <a:solidFill>
+                        <a:srgbClr val="E5E5E5"/>
+                      </a:solidFill>
+                      <a:prstDash val="solid"/>
+                      <a:round/>
+                      <a:headEnd type="none" w="med" len="med"/>
+                      <a:tailEnd type="none" w="med" len="med"/>
+                    </a:lnT>
+                    <a:lnB w="6350" cap="flat" cmpd="sng" algn="ctr">
+                      <a:solidFill>
+                        <a:srgbClr val="E5E5E5"/>
+                      </a:solidFill>
+                      <a:prstDash val="solid"/>
+                      <a:round/>
+                      <a:headEnd type="none" w="med" len="med"/>
+                      <a:tailEnd type="none" w="med" len="med"/>
+                    </a:lnB>
+                    <a:solidFill>
+                      <a:srgbClr val="F7F7F9"/>
+                    </a:solidFill>
+                  </a:tcPr>
+                </a:tc>
+                <a:tc>
+                  <a:txBody>
+                    <a:bodyPr/>
+                    <a:lstStyle/>
+                    <a:p>
+                      <a:pPr algn="l" indent="0" marL="0">
+                        <a:buNone/>
+                      </a:pPr>
+                      <a:r>
+                        <a:rPr lang="en-US" sz="1150" b="1" dirty="0">
+                          <a:solidFill>
+                            <a:srgbClr val="333333"/>
+                          </a:solidFill>
+                          <a:latin typeface="Noto Sans TC Bold" pitchFamily="34" charset="0"/>
+                          <a:ea typeface="Noto Sans TC Bold" pitchFamily="34" charset="-122"/>
+                          <a:cs typeface="Noto Sans TC Bold" pitchFamily="34" charset="-120"/>
+                        </a:rPr>
+                        <a:t>全家仁德德南店站</a:t>
+                      </a:r>
+                      <a:endParaRPr lang="en-US" sz="1150" dirty="0">
+                        <a:latin typeface="Noto Sans TC Bold" charset="0"/>
+                        <a:ea typeface="Noto Sans TC Bold" charset="0"/>
+                        <a:cs typeface="Noto Sans TC Bold" charset="0"/>
+                      </a:endParaRPr>
+                    </a:p>
+                  </a:txBody>
+                  <a:tcPr marL="91440" marR="91440" marT="45720" marB="45720" anchor="ctr">
+                    <a:lnL w="6350" cap="flat" cmpd="sng" algn="ctr">
+                      <a:solidFill>
+                        <a:srgbClr val="E5E5E5"/>
+                      </a:solidFill>
+                      <a:prstDash val="solid"/>
+                      <a:round/>
+                      <a:headEnd type="none" w="med" len="med"/>
+                      <a:tailEnd type="none" w="med" len="med"/>
+                    </a:lnL>
+                    <a:lnR w="6350" cap="flat" cmpd="sng" algn="ctr">
+                      <a:solidFill>
+                        <a:srgbClr val="E5E5E5"/>
+                      </a:solidFill>
+                      <a:prstDash val="solid"/>
+                      <a:round/>
+                      <a:headEnd type="none" w="med" len="med"/>
+                      <a:tailEnd type="none" w="med" len="med"/>
+                    </a:lnR>
+                    <a:lnT w="6350" cap="flat" cmpd="sng" algn="ctr">
+                      <a:solidFill>
+                        <a:srgbClr val="E5E5E5"/>
+                      </a:solidFill>
+                      <a:prstDash val="solid"/>
+                      <a:round/>
+                      <a:headEnd type="none" w="med" len="med"/>
+                      <a:tailEnd type="none" w="med" len="med"/>
+                    </a:lnT>
+                    <a:lnB w="6350" cap="flat" cmpd="sng" algn="ctr">
+                      <a:solidFill>
+                        <a:srgbClr val="E5E5E5"/>
+                      </a:solidFill>
+                      <a:prstDash val="solid"/>
+                      <a:round/>
+                      <a:headEnd type="none" w="med" len="med"/>
+                      <a:tailEnd type="none" w="med" len="med"/>
+                    </a:lnB>
+                    <a:solidFill>
+                      <a:srgbClr val="F7F7F9"/>
+                    </a:solidFill>
+                  </a:tcPr>
+                </a:tc>
+                <a:tc>
+                  <a:txBody>
+                    <a:bodyPr/>
+                    <a:lstStyle/>
+                    <a:p>
+                      <a:pPr algn="ctr" indent="0" marL="0">
+                        <a:buNone/>
+                      </a:pPr>
+                      <a:r>
+                        <a:rPr lang="en-US" sz="1200" b="1" dirty="0">
+                          <a:solidFill>
+                            <a:srgbClr val="0076A9"/>
+                          </a:solidFill>
+                          <a:latin typeface="Noto Sans TC Bold" pitchFamily="34" charset="0"/>
+                          <a:ea typeface="Noto Sans TC Bold" pitchFamily="34" charset="-122"/>
+                          <a:cs typeface="Noto Sans TC Bold" pitchFamily="34" charset="-120"/>
+                        </a:rPr>
+                        <a:t>2,926</a:t>
+                      </a:r>
+                      <a:endParaRPr lang="en-US" sz="1200" dirty="0">
+                        <a:latin typeface="Noto Sans TC Bold" charset="0"/>
+                        <a:ea typeface="Noto Sans TC Bold" charset="0"/>
+                        <a:cs typeface="Noto Sans TC Bold" charset="0"/>
+                      </a:endParaRPr>
+                    </a:p>
+                  </a:txBody>
+                  <a:tcPr marL="91440" marR="91440" marT="45720" marB="45720" anchor="ctr">
+                    <a:lnL w="6350" cap="flat" cmpd="sng" algn="ctr">
+                      <a:solidFill>
+                        <a:srgbClr val="E5E5E5"/>
+                      </a:solidFill>
+                      <a:prstDash val="solid"/>
+                      <a:round/>
+                      <a:headEnd type="none" w="med" len="med"/>
+                      <a:tailEnd type="none" w="med" len="med"/>
+                    </a:lnL>
+                    <a:lnR w="6350" cap="flat" cmpd="sng" algn="ctr">
+                      <a:solidFill>
+                        <a:srgbClr val="E5E5E5"/>
+                      </a:solidFill>
+                      <a:prstDash val="solid"/>
+                      <a:round/>
+                      <a:headEnd type="none" w="med" len="med"/>
+                      <a:tailEnd type="none" w="med" len="med"/>
+                    </a:lnR>
+                    <a:lnT w="6350" cap="flat" cmpd="sng" algn="ctr">
+                      <a:solidFill>
+                        <a:srgbClr val="E5E5E5"/>
+                      </a:solidFill>
+                      <a:prstDash val="solid"/>
+                      <a:round/>
+                      <a:headEnd type="none" w="med" len="med"/>
+                      <a:tailEnd type="none" w="med" len="med"/>
+                    </a:lnT>
+                    <a:lnB w="6350" cap="flat" cmpd="sng" algn="ctr">
+                      <a:solidFill>
+                        <a:srgbClr val="E5E5E5"/>
+                      </a:solidFill>
+                      <a:prstDash val="solid"/>
+                      <a:round/>
+                      <a:headEnd type="none" w="med" len="med"/>
+                      <a:tailEnd type="none" w="med" len="med"/>
+                    </a:lnB>
+                    <a:solidFill>
+                      <a:srgbClr val="F7F7F9"/>
+                    </a:solidFill>
+                  </a:tcPr>
+                </a:tc>
+                <a:tc>
+                  <a:txBody>
+                    <a:bodyPr/>
+                    <a:lstStyle/>
+                    <a:p>
+                      <a:pPr algn="ctr" indent="0" marL="0">
+                        <a:buNone/>
+                      </a:pPr>
+                      <a:r>
+                        <a:rPr lang="en-US" sz="950" dirty="0">
+                          <a:solidFill>
+                            <a:srgbClr val="888888"/>
+                          </a:solidFill>
+                          <a:latin typeface="Noto Sans TC Medium" pitchFamily="34" charset="0"/>
+                          <a:ea typeface="Noto Sans TC Medium" pitchFamily="34" charset="-122"/>
+                          <a:cs typeface="Noto Sans TC Medium" pitchFamily="34" charset="-120"/>
+                        </a:rPr>
+                        <a:t>－（首次記錄）</a:t>
+                      </a:r>
+                      <a:endParaRPr lang="en-US" sz="950" dirty="0">
+                        <a:latin typeface="Noto Sans TC Medium" charset="0"/>
+                        <a:ea typeface="Noto Sans TC Medium" charset="0"/>
+                        <a:cs typeface="Noto Sans TC Medium" charset="0"/>
+                      </a:endParaRPr>
+                    </a:p>
+                  </a:txBody>
+                  <a:tcPr marL="91440" marR="91440" marT="45720" marB="45720" anchor="ctr">
+                    <a:lnL w="6350" cap="flat" cmpd="sng" algn="ctr">
+                      <a:solidFill>
+                        <a:srgbClr val="E5E5E5"/>
+                      </a:solidFill>
+                      <a:prstDash val="solid"/>
+                      <a:round/>
+                      <a:headEnd type="none" w="med" len="med"/>
+                      <a:tailEnd type="none" w="med" len="med"/>
+                    </a:lnL>
+                    <a:lnR w="6350" cap="flat" cmpd="sng" algn="ctr">
+                      <a:solidFill>
+                        <a:srgbClr val="E5E5E5"/>
+                      </a:solidFill>
+                      <a:prstDash val="solid"/>
+                      <a:round/>
+                      <a:headEnd type="none" w="med" len="med"/>
+                      <a:tailEnd type="none" w="med" len="med"/>
+                    </a:lnR>
+                    <a:lnT w="6350" cap="flat" cmpd="sng" algn="ctr">
+                      <a:solidFill>
+                        <a:srgbClr val="E5E5E5"/>
+                      </a:solidFill>
+                      <a:prstDash val="solid"/>
+                      <a:round/>
+                      <a:headEnd type="none" w="med" len="med"/>
+                      <a:tailEnd type="none" w="med" len="med"/>
+                    </a:lnT>
+                    <a:lnB w="6350" cap="flat" cmpd="sng" algn="ctr">
+                      <a:solidFill>
+                        <a:srgbClr val="E5E5E5"/>
+                      </a:solidFill>
+                      <a:prstDash val="solid"/>
+                      <a:round/>
+                      <a:headEnd type="none" w="med" len="med"/>
+                      <a:tailEnd type="none" w="med" len="med"/>
+                    </a:lnB>
+                    <a:solidFill>
+                      <a:srgbClr val="F7F7F9"/>
+                    </a:solidFill>
+                  </a:tcPr>
+                </a:tc>
+              </a:tr>
+              <a:tr h="384048">
+                <a:tc>
+                  <a:txBody>
+                    <a:bodyPr/>
+                    <a:lstStyle/>
+                    <a:p>
+                      <a:pPr algn="ctr" indent="0" marL="0">
+                        <a:buNone/>
+                      </a:pPr>
+                      <a:r>
+                        <a:rPr lang="en-US" sz="1400" b="1" dirty="0">
+                          <a:solidFill>
+                            <a:srgbClr val="888888"/>
+                          </a:solidFill>
+                          <a:latin typeface="Noto Sans TC Black" pitchFamily="34" charset="0"/>
+                          <a:ea typeface="Noto Sans TC Black" pitchFamily="34" charset="-122"/>
+                          <a:cs typeface="Noto Sans TC Black" pitchFamily="34" charset="-120"/>
+                        </a:rPr>
+                        <a:t>C</a:t>
+                      </a:r>
+                      <a:endParaRPr lang="en-US" sz="1400" dirty="0">
+                        <a:latin typeface="Noto Sans TC Black" charset="0"/>
+                        <a:ea typeface="Noto Sans TC Black" charset="0"/>
+                        <a:cs typeface="Noto Sans TC Black" charset="0"/>
+                      </a:endParaRPr>
+                    </a:p>
+                  </a:txBody>
+                  <a:tcPr marL="91440" marR="91440" marT="45720" marB="45720" anchor="ctr">
+                    <a:lnL w="6350" cap="flat" cmpd="sng" algn="ctr">
+                      <a:solidFill>
+                        <a:srgbClr val="E5E5E5"/>
+                      </a:solidFill>
+                      <a:prstDash val="solid"/>
+                      <a:round/>
+                      <a:headEnd type="none" w="med" len="med"/>
+                      <a:tailEnd type="none" w="med" len="med"/>
+                    </a:lnL>
+                    <a:lnR w="6350" cap="flat" cmpd="sng" algn="ctr">
+                      <a:solidFill>
+                        <a:srgbClr val="E5E5E5"/>
+                      </a:solidFill>
+                      <a:prstDash val="solid"/>
+                      <a:round/>
+                      <a:headEnd type="none" w="med" len="med"/>
+                      <a:tailEnd type="none" w="med" len="med"/>
+                    </a:lnR>
+                    <a:lnT w="6350" cap="flat" cmpd="sng" algn="ctr">
+                      <a:solidFill>
+                        <a:srgbClr val="E5E5E5"/>
+                      </a:solidFill>
+                      <a:prstDash val="solid"/>
+                      <a:round/>
+                      <a:headEnd type="none" w="med" len="med"/>
+                      <a:tailEnd type="none" w="med" len="med"/>
+                    </a:lnT>
+                    <a:lnB w="6350" cap="flat" cmpd="sng" algn="ctr">
+                      <a:solidFill>
+                        <a:srgbClr val="E5E5E5"/>
+                      </a:solidFill>
+                      <a:prstDash val="solid"/>
+                      <a:round/>
+                      <a:headEnd type="none" w="med" len="med"/>
+                      <a:tailEnd type="none" w="med" len="med"/>
+                    </a:lnB>
+                    <a:solidFill>
+                      <a:srgbClr val="FFFFFF"/>
+                    </a:solidFill>
+                  </a:tcPr>
+                </a:tc>
+                <a:tc>
+                  <a:txBody>
+                    <a:bodyPr/>
+                    <a:lstStyle/>
+                    <a:p>
+                      <a:pPr algn="ctr" indent="0" marL="0">
+                        <a:buNone/>
+                      </a:pPr>
+                      <a:r>
+                        <a:rPr lang="en-US" sz="1050" dirty="0">
+                          <a:solidFill>
+                            <a:srgbClr val="888888"/>
+                          </a:solidFill>
+                          <a:latin typeface="Noto Sans TC Medium" pitchFamily="34" charset="0"/>
+                          <a:ea typeface="Noto Sans TC Medium" pitchFamily="34" charset="-122"/>
+                          <a:cs typeface="Noto Sans TC Medium" pitchFamily="34" charset="-120"/>
+                        </a:rPr>
+                        <a:t>第 500 名</a:t>
+                      </a:r>
+                      <a:endParaRPr lang="en-US" sz="1050" dirty="0">
+                        <a:latin typeface="Noto Sans TC Medium" charset="0"/>
+                        <a:ea typeface="Noto Sans TC Medium" charset="0"/>
+                        <a:cs typeface="Noto Sans TC Medium" charset="0"/>
+                      </a:endParaRPr>
+                    </a:p>
+                  </a:txBody>
+                  <a:tcPr marL="91440" marR="91440" marT="45720" marB="45720" anchor="ctr">
+                    <a:lnL w="6350" cap="flat" cmpd="sng" algn="ctr">
+                      <a:solidFill>
+                        <a:srgbClr val="E5E5E5"/>
+                      </a:solidFill>
+                      <a:prstDash val="solid"/>
+                      <a:round/>
+                      <a:headEnd type="none" w="med" len="med"/>
+                      <a:tailEnd type="none" w="med" len="med"/>
+                    </a:lnL>
+                    <a:lnR w="6350" cap="flat" cmpd="sng" algn="ctr">
+                      <a:solidFill>
+                        <a:srgbClr val="E5E5E5"/>
+                      </a:solidFill>
+                      <a:prstDash val="solid"/>
+                      <a:round/>
+                      <a:headEnd type="none" w="med" len="med"/>
+                      <a:tailEnd type="none" w="med" len="med"/>
+                    </a:lnR>
+                    <a:lnT w="6350" cap="flat" cmpd="sng" algn="ctr">
+                      <a:solidFill>
+                        <a:srgbClr val="E5E5E5"/>
+                      </a:solidFill>
+                      <a:prstDash val="solid"/>
+                      <a:round/>
+                      <a:headEnd type="none" w="med" len="med"/>
+                      <a:tailEnd type="none" w="med" len="med"/>
+                    </a:lnT>
+                    <a:lnB w="6350" cap="flat" cmpd="sng" algn="ctr">
+                      <a:solidFill>
+                        <a:srgbClr val="E5E5E5"/>
+                      </a:solidFill>
+                      <a:prstDash val="solid"/>
+                      <a:round/>
+                      <a:headEnd type="none" w="med" len="med"/>
+                      <a:tailEnd type="none" w="med" len="med"/>
+                    </a:lnB>
+                    <a:solidFill>
+                      <a:srgbClr val="FFFFFF"/>
+                    </a:solidFill>
+                  </a:tcPr>
+                </a:tc>
+                <a:tc>
+                  <a:txBody>
+                    <a:bodyPr/>
+                    <a:lstStyle/>
+                    <a:p>
+                      <a:pPr algn="ctr" indent="0" marL="0">
+                        <a:buNone/>
+                      </a:pPr>
+                      <a:r>
+                        <a:rPr lang="en-US" sz="1100" dirty="0">
+                          <a:solidFill>
+                            <a:srgbClr val="333333"/>
+                          </a:solidFill>
+                          <a:latin typeface="Noto Sans TC Medium" pitchFamily="34" charset="0"/>
+                          <a:ea typeface="Noto Sans TC Medium" pitchFamily="34" charset="-122"/>
+                          <a:cs typeface="Noto Sans TC Medium" pitchFamily="34" charset="-120"/>
+                        </a:rPr>
+                        <a:t>高雄</a:t>
+                      </a:r>
+                      <a:endParaRPr lang="en-US" sz="1100" dirty="0">
+                        <a:latin typeface="Noto Sans TC Medium" charset="0"/>
+                        <a:ea typeface="Noto Sans TC Medium" charset="0"/>
+                        <a:cs typeface="Noto Sans TC Medium" charset="0"/>
+                      </a:endParaRPr>
+                    </a:p>
+                  </a:txBody>
+                  <a:tcPr marL="91440" marR="91440" marT="45720" marB="45720" anchor="ctr">
+                    <a:lnL w="6350" cap="flat" cmpd="sng" algn="ctr">
+                      <a:solidFill>
+                        <a:srgbClr val="E5E5E5"/>
+                      </a:solidFill>
+                      <a:prstDash val="solid"/>
+                      <a:round/>
+                      <a:headEnd type="none" w="med" len="med"/>
+                      <a:tailEnd type="none" w="med" len="med"/>
+                    </a:lnL>
+                    <a:lnR w="6350" cap="flat" cmpd="sng" algn="ctr">
+                      <a:solidFill>
+                        <a:srgbClr val="E5E5E5"/>
+                      </a:solidFill>
+                      <a:prstDash val="solid"/>
+                      <a:round/>
+                      <a:headEnd type="none" w="med" len="med"/>
+                      <a:tailEnd type="none" w="med" len="med"/>
+                    </a:lnR>
+                    <a:lnT w="6350" cap="flat" cmpd="sng" algn="ctr">
+                      <a:solidFill>
+                        <a:srgbClr val="E5E5E5"/>
+                      </a:solidFill>
+                      <a:prstDash val="solid"/>
+                      <a:round/>
+                      <a:headEnd type="none" w="med" len="med"/>
+                      <a:tailEnd type="none" w="med" len="med"/>
+                    </a:lnT>
+                    <a:lnB w="6350" cap="flat" cmpd="sng" algn="ctr">
+                      <a:solidFill>
+                        <a:srgbClr val="E5E5E5"/>
+                      </a:solidFill>
+                      <a:prstDash val="solid"/>
+                      <a:round/>
+                      <a:headEnd type="none" w="med" len="med"/>
+                      <a:tailEnd type="none" w="med" len="med"/>
+                    </a:lnB>
+                    <a:solidFill>
+                      <a:srgbClr val="FFFFFF"/>
+                    </a:solidFill>
+                  </a:tcPr>
+                </a:tc>
+                <a:tc>
+                  <a:txBody>
+                    <a:bodyPr/>
+                    <a:lstStyle/>
+                    <a:p>
+                      <a:pPr algn="l" indent="0" marL="0">
+                        <a:buNone/>
+                      </a:pPr>
+                      <a:r>
+                        <a:rPr lang="en-US" sz="1150" b="1" dirty="0">
+                          <a:solidFill>
+                            <a:srgbClr val="333333"/>
+                          </a:solidFill>
+                          <a:latin typeface="Noto Sans TC Bold" pitchFamily="34" charset="0"/>
+                          <a:ea typeface="Noto Sans TC Bold" pitchFamily="34" charset="-122"/>
+                          <a:cs typeface="Noto Sans TC Bold" pitchFamily="34" charset="-120"/>
+                        </a:rPr>
+                        <a:t>全聯福利中心三民十全三店站</a:t>
+                      </a:r>
+                      <a:endParaRPr lang="en-US" sz="1150" dirty="0">
+                        <a:latin typeface="Noto Sans TC Bold" charset="0"/>
+                        <a:ea typeface="Noto Sans TC Bold" charset="0"/>
+                        <a:cs typeface="Noto Sans TC Bold" charset="0"/>
+                      </a:endParaRPr>
+                    </a:p>
+                  </a:txBody>
+                  <a:tcPr marL="91440" marR="91440" marT="45720" marB="45720" anchor="ctr">
+                    <a:lnL w="6350" cap="flat" cmpd="sng" algn="ctr">
+                      <a:solidFill>
+                        <a:srgbClr val="E5E5E5"/>
+                      </a:solidFill>
+                      <a:prstDash val="solid"/>
+                      <a:round/>
+                      <a:headEnd type="none" w="med" len="med"/>
+                      <a:tailEnd type="none" w="med" len="med"/>
+                    </a:lnL>
+                    <a:lnR w="6350" cap="flat" cmpd="sng" algn="ctr">
+                      <a:solidFill>
+                        <a:srgbClr val="E5E5E5"/>
+                      </a:solidFill>
+                      <a:prstDash val="solid"/>
+                      <a:round/>
+                      <a:headEnd type="none" w="med" len="med"/>
+                      <a:tailEnd type="none" w="med" len="med"/>
+                    </a:lnR>
+                    <a:lnT w="6350" cap="flat" cmpd="sng" algn="ctr">
+                      <a:solidFill>
+                        <a:srgbClr val="E5E5E5"/>
+                      </a:solidFill>
+                      <a:prstDash val="solid"/>
+                      <a:round/>
+                      <a:headEnd type="none" w="med" len="med"/>
+                      <a:tailEnd type="none" w="med" len="med"/>
+                    </a:lnT>
+                    <a:lnB w="6350" cap="flat" cmpd="sng" algn="ctr">
+                      <a:solidFill>
+                        <a:srgbClr val="E5E5E5"/>
+                      </a:solidFill>
+                      <a:prstDash val="solid"/>
+                      <a:round/>
+                      <a:headEnd type="none" w="med" len="med"/>
+                      <a:tailEnd type="none" w="med" len="med"/>
+                    </a:lnB>
+                    <a:solidFill>
+                      <a:srgbClr val="FFFFFF"/>
+                    </a:solidFill>
+                  </a:tcPr>
+                </a:tc>
+                <a:tc>
+                  <a:txBody>
+                    <a:bodyPr/>
+                    <a:lstStyle/>
+                    <a:p>
+                      <a:pPr algn="ctr" indent="0" marL="0">
+                        <a:buNone/>
+                      </a:pPr>
+                      <a:r>
+                        <a:rPr lang="en-US" sz="1200" b="1" dirty="0">
+                          <a:solidFill>
+                            <a:srgbClr val="0076A9"/>
+                          </a:solidFill>
+                          <a:latin typeface="Noto Sans TC Bold" pitchFamily="34" charset="0"/>
+                          <a:ea typeface="Noto Sans TC Bold" pitchFamily="34" charset="-122"/>
+                          <a:cs typeface="Noto Sans TC Bold" pitchFamily="34" charset="-120"/>
+                        </a:rPr>
+                        <a:t>3,266</a:t>
+                      </a:r>
+                      <a:endParaRPr lang="en-US" sz="1200" dirty="0">
+                        <a:latin typeface="Noto Sans TC Bold" charset="0"/>
+                        <a:ea typeface="Noto Sans TC Bold" charset="0"/>
+                        <a:cs typeface="Noto Sans TC Bold" charset="0"/>
+                      </a:endParaRPr>
+                    </a:p>
+                  </a:txBody>
+                  <a:tcPr marL="91440" marR="91440" marT="45720" marB="45720" anchor="ctr">
+                    <a:lnL w="6350" cap="flat" cmpd="sng" algn="ctr">
+                      <a:solidFill>
+                        <a:srgbClr val="E5E5E5"/>
+                      </a:solidFill>
+                      <a:prstDash val="solid"/>
+                      <a:round/>
+                      <a:headEnd type="none" w="med" len="med"/>
+                      <a:tailEnd type="none" w="med" len="med"/>
+                    </a:lnL>
+                    <a:lnR w="6350" cap="flat" cmpd="sng" algn="ctr">
+                      <a:solidFill>
+                        <a:srgbClr val="E5E5E5"/>
+                      </a:solidFill>
+                      <a:prstDash val="solid"/>
+                      <a:round/>
+                      <a:headEnd type="none" w="med" len="med"/>
+                      <a:tailEnd type="none" w="med" len="med"/>
+                    </a:lnR>
+                    <a:lnT w="6350" cap="flat" cmpd="sng" algn="ctr">
+                      <a:solidFill>
+                        <a:srgbClr val="E5E5E5"/>
+                      </a:solidFill>
+                      <a:prstDash val="solid"/>
+                      <a:round/>
+                      <a:headEnd type="none" w="med" len="med"/>
+                      <a:tailEnd type="none" w="med" len="med"/>
+                    </a:lnT>
+                    <a:lnB w="6350" cap="flat" cmpd="sng" algn="ctr">
+                      <a:solidFill>
+                        <a:srgbClr val="E5E5E5"/>
+                      </a:solidFill>
+                      <a:prstDash val="solid"/>
+                      <a:round/>
+                      <a:headEnd type="none" w="med" len="med"/>
+                      <a:tailEnd type="none" w="med" len="med"/>
+                    </a:lnB>
+                    <a:solidFill>
+                      <a:srgbClr val="FFFFFF"/>
+                    </a:solidFill>
+                  </a:tcPr>
+                </a:tc>
+                <a:tc>
+                  <a:txBody>
+                    <a:bodyPr/>
+                    <a:lstStyle/>
+                    <a:p>
+                      <a:pPr algn="ctr" indent="0" marL="0">
+                        <a:buNone/>
+                      </a:pPr>
+                      <a:r>
+                        <a:rPr lang="en-US" sz="950" dirty="0">
+                          <a:solidFill>
+                            <a:srgbClr val="888888"/>
+                          </a:solidFill>
+                          <a:latin typeface="Noto Sans TC Medium" pitchFamily="34" charset="0"/>
+                          <a:ea typeface="Noto Sans TC Medium" pitchFamily="34" charset="-122"/>
+                          <a:cs typeface="Noto Sans TC Medium" pitchFamily="34" charset="-120"/>
+                        </a:rPr>
+                        <a:t>－（首次記錄）</a:t>
+                      </a:r>
+                      <a:endParaRPr lang="en-US" sz="950" dirty="0">
+                        <a:latin typeface="Noto Sans TC Medium" charset="0"/>
+                        <a:ea typeface="Noto Sans TC Medium" charset="0"/>
+                        <a:cs typeface="Noto Sans TC Medium" charset="0"/>
+                      </a:endParaRPr>
+                    </a:p>
+                  </a:txBody>
+                  <a:tcPr marL="91440" marR="91440" marT="45720" marB="45720" anchor="ctr">
+                    <a:lnL w="6350" cap="flat" cmpd="sng" algn="ctr">
+                      <a:solidFill>
+                        <a:srgbClr val="E5E5E5"/>
+                      </a:solidFill>
+                      <a:prstDash val="solid"/>
+                      <a:round/>
+                      <a:headEnd type="none" w="med" len="med"/>
+                      <a:tailEnd type="none" w="med" len="med"/>
+                    </a:lnL>
+                    <a:lnR w="6350" cap="flat" cmpd="sng" algn="ctr">
+                      <a:solidFill>
+                        <a:srgbClr val="E5E5E5"/>
+                      </a:solidFill>
+                      <a:prstDash val="solid"/>
+                      <a:round/>
+                      <a:headEnd type="none" w="med" len="med"/>
+                      <a:tailEnd type="none" w="med" len="med"/>
+                    </a:lnR>
+                    <a:lnT w="6350" cap="flat" cmpd="sng" algn="ctr">
+                      <a:solidFill>
+                        <a:srgbClr val="E5E5E5"/>
+                      </a:solidFill>
+                      <a:prstDash val="solid"/>
+                      <a:round/>
+                      <a:headEnd type="none" w="med" len="med"/>
+                      <a:tailEnd type="none" w="med" len="med"/>
+                    </a:lnT>
+                    <a:lnB w="6350" cap="flat" cmpd="sng" algn="ctr">
+                      <a:solidFill>
+                        <a:srgbClr val="E5E5E5"/>
+                      </a:solidFill>
+                      <a:prstDash val="solid"/>
+                      <a:round/>
+                      <a:headEnd type="none" w="med" len="med"/>
+                      <a:tailEnd type="none" w="med" len="med"/>
+                    </a:lnB>
+                    <a:solidFill>
+                      <a:srgbClr val="FFFFFF"/>
+                    </a:solidFill>
+                  </a:tcPr>
+                </a:tc>
+              </a:tr>
+              <a:tr h="384048">
+                <a:tc>
+                  <a:txBody>
+                    <a:bodyPr/>
+                    <a:lstStyle/>
+                    <a:p>
+                      <a:pPr algn="ctr" indent="0" marL="0">
+                        <a:buNone/>
+                      </a:pPr>
+                      <a:r>
+                        <a:rPr lang="en-US" sz="1400" b="1" dirty="0">
+                          <a:solidFill>
+                            <a:srgbClr val="888888"/>
+                          </a:solidFill>
+                          <a:latin typeface="Noto Sans TC Black" pitchFamily="34" charset="0"/>
+                          <a:ea typeface="Noto Sans TC Black" pitchFamily="34" charset="-122"/>
+                          <a:cs typeface="Noto Sans TC Black" pitchFamily="34" charset="-120"/>
+                        </a:rPr>
+                        <a:t>C</a:t>
+                      </a:r>
+                      <a:endParaRPr lang="en-US" sz="1400" dirty="0">
+                        <a:latin typeface="Noto Sans TC Black" charset="0"/>
+                        <a:ea typeface="Noto Sans TC Black" charset="0"/>
+                        <a:cs typeface="Noto Sans TC Black" charset="0"/>
+                      </a:endParaRPr>
+                    </a:p>
+                  </a:txBody>
+                  <a:tcPr marL="91440" marR="91440" marT="45720" marB="45720" anchor="ctr">
+                    <a:lnL w="6350" cap="flat" cmpd="sng" algn="ctr">
+                      <a:solidFill>
+                        <a:srgbClr val="E5E5E5"/>
+                      </a:solidFill>
+                      <a:prstDash val="solid"/>
+                      <a:round/>
+                      <a:headEnd type="none" w="med" len="med"/>
+                      <a:tailEnd type="none" w="med" len="med"/>
+                    </a:lnL>
+                    <a:lnR w="6350" cap="flat" cmpd="sng" algn="ctr">
+                      <a:solidFill>
+                        <a:srgbClr val="E5E5E5"/>
+                      </a:solidFill>
+                      <a:prstDash val="solid"/>
+                      <a:round/>
+                      <a:headEnd type="none" w="med" len="med"/>
+                      <a:tailEnd type="none" w="med" len="med"/>
+                    </a:lnR>
+                    <a:lnT w="6350" cap="flat" cmpd="sng" algn="ctr">
+                      <a:solidFill>
+                        <a:srgbClr val="E5E5E5"/>
+                      </a:solidFill>
+                      <a:prstDash val="solid"/>
+                      <a:round/>
+                      <a:headEnd type="none" w="med" len="med"/>
+                      <a:tailEnd type="none" w="med" len="med"/>
+                    </a:lnT>
+                    <a:lnB w="6350" cap="flat" cmpd="sng" algn="ctr">
+                      <a:solidFill>
+                        <a:srgbClr val="E5E5E5"/>
+                      </a:solidFill>
+                      <a:prstDash val="solid"/>
+                      <a:round/>
+                      <a:headEnd type="none" w="med" len="med"/>
+                      <a:tailEnd type="none" w="med" len="med"/>
+                    </a:lnB>
+                    <a:solidFill>
+                      <a:srgbClr val="F7F7F9"/>
+                    </a:solidFill>
+                  </a:tcPr>
+                </a:tc>
+                <a:tc>
+                  <a:txBody>
+                    <a:bodyPr/>
+                    <a:lstStyle/>
+                    <a:p>
+                      <a:pPr algn="ctr" indent="0" marL="0">
+                        <a:buNone/>
+                      </a:pPr>
+                      <a:r>
+                        <a:rPr lang="en-US" sz="1050" dirty="0">
+                          <a:solidFill>
+                            <a:srgbClr val="888888"/>
+                          </a:solidFill>
+                          <a:latin typeface="Noto Sans TC Medium" pitchFamily="34" charset="0"/>
+                          <a:ea typeface="Noto Sans TC Medium" pitchFamily="34" charset="-122"/>
+                          <a:cs typeface="Noto Sans TC Medium" pitchFamily="34" charset="-120"/>
+                        </a:rPr>
+                        <a:t>第 448 名</a:t>
+                      </a:r>
+                      <a:endParaRPr lang="en-US" sz="1050" dirty="0">
+                        <a:latin typeface="Noto Sans TC Medium" charset="0"/>
+                        <a:ea typeface="Noto Sans TC Medium" charset="0"/>
+                        <a:cs typeface="Noto Sans TC Medium" charset="0"/>
+                      </a:endParaRPr>
+                    </a:p>
+                  </a:txBody>
+                  <a:tcPr marL="91440" marR="91440" marT="45720" marB="45720" anchor="ctr">
+                    <a:lnL w="6350" cap="flat" cmpd="sng" algn="ctr">
+                      <a:solidFill>
+                        <a:srgbClr val="E5E5E5"/>
+                      </a:solidFill>
+                      <a:prstDash val="solid"/>
+                      <a:round/>
+                      <a:headEnd type="none" w="med" len="med"/>
+                      <a:tailEnd type="none" w="med" len="med"/>
+                    </a:lnL>
+                    <a:lnR w="6350" cap="flat" cmpd="sng" algn="ctr">
+                      <a:solidFill>
+                        <a:srgbClr val="E5E5E5"/>
+                      </a:solidFill>
+                      <a:prstDash val="solid"/>
+                      <a:round/>
+                      <a:headEnd type="none" w="med" len="med"/>
+                      <a:tailEnd type="none" w="med" len="med"/>
+                    </a:lnR>
+                    <a:lnT w="6350" cap="flat" cmpd="sng" algn="ctr">
+                      <a:solidFill>
+                        <a:srgbClr val="E5E5E5"/>
+                      </a:solidFill>
+                      <a:prstDash val="solid"/>
+                      <a:round/>
+                      <a:headEnd type="none" w="med" len="med"/>
+                      <a:tailEnd type="none" w="med" len="med"/>
+                    </a:lnT>
+                    <a:lnB w="6350" cap="flat" cmpd="sng" algn="ctr">
+                      <a:solidFill>
+                        <a:srgbClr val="E5E5E5"/>
+                      </a:solidFill>
+                      <a:prstDash val="solid"/>
+                      <a:round/>
+                      <a:headEnd type="none" w="med" len="med"/>
+                      <a:tailEnd type="none" w="med" len="med"/>
+                    </a:lnB>
+                    <a:solidFill>
+                      <a:srgbClr val="F7F7F9"/>
+                    </a:solidFill>
+                  </a:tcPr>
+                </a:tc>
+                <a:tc>
+                  <a:txBody>
+                    <a:bodyPr/>
+                    <a:lstStyle/>
+                    <a:p>
+                      <a:pPr algn="ctr" indent="0" marL="0">
+                        <a:buNone/>
+                      </a:pPr>
+                      <a:r>
+                        <a:rPr lang="en-US" sz="1100" dirty="0">
+                          <a:solidFill>
+                            <a:srgbClr val="333333"/>
+                          </a:solidFill>
+                          <a:latin typeface="Noto Sans TC Medium" pitchFamily="34" charset="0"/>
+                          <a:ea typeface="Noto Sans TC Medium" pitchFamily="34" charset="-122"/>
+                          <a:cs typeface="Noto Sans TC Medium" pitchFamily="34" charset="-120"/>
+                        </a:rPr>
+                        <a:t>高雄</a:t>
+                      </a:r>
+                      <a:endParaRPr lang="en-US" sz="1100" dirty="0">
+                        <a:latin typeface="Noto Sans TC Medium" charset="0"/>
+                        <a:ea typeface="Noto Sans TC Medium" charset="0"/>
+                        <a:cs typeface="Noto Sans TC Medium" charset="0"/>
+                      </a:endParaRPr>
+                    </a:p>
+                  </a:txBody>
+                  <a:tcPr marL="91440" marR="91440" marT="45720" marB="45720" anchor="ctr">
+                    <a:lnL w="6350" cap="flat" cmpd="sng" algn="ctr">
+                      <a:solidFill>
+                        <a:srgbClr val="E5E5E5"/>
+                      </a:solidFill>
+                      <a:prstDash val="solid"/>
+                      <a:round/>
+                      <a:headEnd type="none" w="med" len="med"/>
+                      <a:tailEnd type="none" w="med" len="med"/>
+                    </a:lnL>
+                    <a:lnR w="6350" cap="flat" cmpd="sng" algn="ctr">
+                      <a:solidFill>
+                        <a:srgbClr val="E5E5E5"/>
+                      </a:solidFill>
+                      <a:prstDash val="solid"/>
+                      <a:round/>
+                      <a:headEnd type="none" w="med" len="med"/>
+                      <a:tailEnd type="none" w="med" len="med"/>
+                    </a:lnR>
+                    <a:lnT w="6350" cap="flat" cmpd="sng" algn="ctr">
+                      <a:solidFill>
+                        <a:srgbClr val="E5E5E5"/>
+                      </a:solidFill>
+                      <a:prstDash val="solid"/>
+                      <a:round/>
+                      <a:headEnd type="none" w="med" len="med"/>
+                      <a:tailEnd type="none" w="med" len="med"/>
+                    </a:lnT>
+                    <a:lnB w="6350" cap="flat" cmpd="sng" algn="ctr">
+                      <a:solidFill>
+                        <a:srgbClr val="E5E5E5"/>
+                      </a:solidFill>
+                      <a:prstDash val="solid"/>
+                      <a:round/>
+                      <a:headEnd type="none" w="med" len="med"/>
+                      <a:tailEnd type="none" w="med" len="med"/>
+                    </a:lnB>
+                    <a:solidFill>
+                      <a:srgbClr val="F7F7F9"/>
+                    </a:solidFill>
+                  </a:tcPr>
+                </a:tc>
+                <a:tc>
+                  <a:txBody>
+                    <a:bodyPr/>
+                    <a:lstStyle/>
+                    <a:p>
+                      <a:pPr algn="l" indent="0" marL="0">
+                        <a:buNone/>
+                      </a:pPr>
+                      <a:r>
+                        <a:rPr lang="en-US" sz="1150" b="1" dirty="0">
+                          <a:solidFill>
+                            <a:srgbClr val="333333"/>
+                          </a:solidFill>
+                          <a:latin typeface="Noto Sans TC Bold" pitchFamily="34" charset="0"/>
+                          <a:ea typeface="Noto Sans TC Bold" pitchFamily="34" charset="-122"/>
+                          <a:cs typeface="Noto Sans TC Bold" pitchFamily="34" charset="-120"/>
+                        </a:rPr>
+                        <a:t>日月光高雄K7廠站</a:t>
+                      </a:r>
+                      <a:endParaRPr lang="en-US" sz="1150" dirty="0">
+                        <a:latin typeface="Noto Sans TC Bold" charset="0"/>
+                        <a:ea typeface="Noto Sans TC Bold" charset="0"/>
+                        <a:cs typeface="Noto Sans TC Bold" charset="0"/>
+                      </a:endParaRPr>
+                    </a:p>
+                  </a:txBody>
+                  <a:tcPr marL="91440" marR="91440" marT="45720" marB="45720" anchor="ctr">
+                    <a:lnL w="6350" cap="flat" cmpd="sng" algn="ctr">
+                      <a:solidFill>
+                        <a:srgbClr val="E5E5E5"/>
+                      </a:solidFill>
+                      <a:prstDash val="solid"/>
+                      <a:round/>
+                      <a:headEnd type="none" w="med" len="med"/>
+                      <a:tailEnd type="none" w="med" len="med"/>
+                    </a:lnL>
+                    <a:lnR w="6350" cap="flat" cmpd="sng" algn="ctr">
+                      <a:solidFill>
+                        <a:srgbClr val="E5E5E5"/>
+                      </a:solidFill>
+                      <a:prstDash val="solid"/>
+                      <a:round/>
+                      <a:headEnd type="none" w="med" len="med"/>
+                      <a:tailEnd type="none" w="med" len="med"/>
+                    </a:lnR>
+                    <a:lnT w="6350" cap="flat" cmpd="sng" algn="ctr">
+                      <a:solidFill>
+                        <a:srgbClr val="E5E5E5"/>
+                      </a:solidFill>
+                      <a:prstDash val="solid"/>
+                      <a:round/>
+                      <a:headEnd type="none" w="med" len="med"/>
+                      <a:tailEnd type="none" w="med" len="med"/>
+                    </a:lnT>
+                    <a:lnB w="6350" cap="flat" cmpd="sng" algn="ctr">
+                      <a:solidFill>
+                        <a:srgbClr val="E5E5E5"/>
+                      </a:solidFill>
+                      <a:prstDash val="solid"/>
+                      <a:round/>
+                      <a:headEnd type="none" w="med" len="med"/>
+                      <a:tailEnd type="none" w="med" len="med"/>
+                    </a:lnB>
+                    <a:solidFill>
+                      <a:srgbClr val="F7F7F9"/>
+                    </a:solidFill>
+                  </a:tcPr>
+                </a:tc>
+                <a:tc>
+                  <a:txBody>
+                    <a:bodyPr/>
+                    <a:lstStyle/>
+                    <a:p>
+                      <a:pPr algn="ctr" indent="0" marL="0">
+                        <a:buNone/>
+                      </a:pPr>
+                      <a:r>
+                        <a:rPr lang="en-US" sz="1200" b="1" dirty="0">
+                          <a:solidFill>
+                            <a:srgbClr val="0076A9"/>
+                          </a:solidFill>
+                          <a:latin typeface="Noto Sans TC Bold" pitchFamily="34" charset="0"/>
+                          <a:ea typeface="Noto Sans TC Bold" pitchFamily="34" charset="-122"/>
+                          <a:cs typeface="Noto Sans TC Bold" pitchFamily="34" charset="-120"/>
+                        </a:rPr>
+                        <a:t>5,400</a:t>
+                      </a:r>
+                      <a:endParaRPr lang="en-US" sz="1200" dirty="0">
+                        <a:latin typeface="Noto Sans TC Bold" charset="0"/>
+                        <a:ea typeface="Noto Sans TC Bold" charset="0"/>
+                        <a:cs typeface="Noto Sans TC Bold" charset="0"/>
+                      </a:endParaRPr>
+                    </a:p>
+                  </a:txBody>
+                  <a:tcPr marL="91440" marR="91440" marT="45720" marB="45720" anchor="ctr">
+                    <a:lnL w="6350" cap="flat" cmpd="sng" algn="ctr">
+                      <a:solidFill>
+                        <a:srgbClr val="E5E5E5"/>
+                      </a:solidFill>
+                      <a:prstDash val="solid"/>
+                      <a:round/>
+                      <a:headEnd type="none" w="med" len="med"/>
+                      <a:tailEnd type="none" w="med" len="med"/>
+                    </a:lnL>
+                    <a:lnR w="6350" cap="flat" cmpd="sng" algn="ctr">
+                      <a:solidFill>
+                        <a:srgbClr val="E5E5E5"/>
+                      </a:solidFill>
+                      <a:prstDash val="solid"/>
+                      <a:round/>
+                      <a:headEnd type="none" w="med" len="med"/>
+                      <a:tailEnd type="none" w="med" len="med"/>
+                    </a:lnR>
+                    <a:lnT w="6350" cap="flat" cmpd="sng" algn="ctr">
+                      <a:solidFill>
+                        <a:srgbClr val="E5E5E5"/>
+                      </a:solidFill>
+                      <a:prstDash val="solid"/>
+                      <a:round/>
+                      <a:headEnd type="none" w="med" len="med"/>
+                      <a:tailEnd type="none" w="med" len="med"/>
+                    </a:lnT>
+                    <a:lnB w="6350" cap="flat" cmpd="sng" algn="ctr">
+                      <a:solidFill>
+                        <a:srgbClr val="E5E5E5"/>
+                      </a:solidFill>
+                      <a:prstDash val="solid"/>
+                      <a:round/>
+                      <a:headEnd type="none" w="med" len="med"/>
+                      <a:tailEnd type="none" w="med" len="med"/>
+                    </a:lnB>
+                    <a:solidFill>
+                      <a:srgbClr val="F7F7F9"/>
+                    </a:solidFill>
+                  </a:tcPr>
+                </a:tc>
+                <a:tc>
+                  <a:txBody>
+                    <a:bodyPr/>
+                    <a:lstStyle/>
+                    <a:p>
+                      <a:pPr algn="ctr" indent="0" marL="0">
+                        <a:buNone/>
+                      </a:pPr>
+                      <a:r>
+                        <a:rPr lang="en-US" sz="950" dirty="0">
+                          <a:solidFill>
+                            <a:srgbClr val="888888"/>
+                          </a:solidFill>
+                          <a:latin typeface="Noto Sans TC Medium" pitchFamily="34" charset="0"/>
+                          <a:ea typeface="Noto Sans TC Medium" pitchFamily="34" charset="-122"/>
+                          <a:cs typeface="Noto Sans TC Medium" pitchFamily="34" charset="-120"/>
+                        </a:rPr>
+                        <a:t>－（首次記錄）</a:t>
+                      </a:r>
+                      <a:endParaRPr lang="en-US" sz="950" dirty="0">
+                        <a:latin typeface="Noto Sans TC Medium" charset="0"/>
+                        <a:ea typeface="Noto Sans TC Medium" charset="0"/>
+                        <a:cs typeface="Noto Sans TC Medium" charset="0"/>
+                      </a:endParaRPr>
+                    </a:p>
+                  </a:txBody>
+                  <a:tcPr marL="91440" marR="91440" marT="45720" marB="45720" anchor="ctr">
+                    <a:lnL w="6350" cap="flat" cmpd="sng" algn="ctr">
+                      <a:solidFill>
+                        <a:srgbClr val="E5E5E5"/>
+                      </a:solidFill>
+                      <a:prstDash val="solid"/>
+                      <a:round/>
+                      <a:headEnd type="none" w="med" len="med"/>
+                      <a:tailEnd type="none" w="med" len="med"/>
+                    </a:lnL>
+                    <a:lnR w="6350" cap="flat" cmpd="sng" algn="ctr">
+                      <a:solidFill>
+                        <a:srgbClr val="E5E5E5"/>
+                      </a:solidFill>
+                      <a:prstDash val="solid"/>
+                      <a:round/>
+                      <a:headEnd type="none" w="med" len="med"/>
+                      <a:tailEnd type="none" w="med" len="med"/>
+                    </a:lnR>
+                    <a:lnT w="6350" cap="flat" cmpd="sng" algn="ctr">
+                      <a:solidFill>
+                        <a:srgbClr val="E5E5E5"/>
+                      </a:solidFill>
+                      <a:prstDash val="solid"/>
+                      <a:round/>
+                      <a:headEnd type="none" w="med" len="med"/>
+                      <a:tailEnd type="none" w="med" len="med"/>
+                    </a:lnT>
+                    <a:lnB w="6350" cap="flat" cmpd="sng" algn="ctr">
+                      <a:solidFill>
+                        <a:srgbClr val="E5E5E5"/>
+                      </a:solidFill>
+                      <a:prstDash val="solid"/>
+                      <a:round/>
+                      <a:headEnd type="none" w="med" len="med"/>
+                      <a:tailEnd type="none" w="med" len="med"/>
+                    </a:lnB>
+                    <a:solidFill>
+                      <a:srgbClr val="F7F7F9"/>
+                    </a:solidFill>
+                  </a:tcPr>
+                </a:tc>
+              </a:tr>
+              <a:tr h="384048">
+                <a:tc>
+                  <a:txBody>
+                    <a:bodyPr/>
+                    <a:lstStyle/>
+                    <a:p>
+                      <a:pPr algn="ctr" indent="0" marL="0">
+                        <a:buNone/>
+                      </a:pPr>
+                      <a:r>
+                        <a:rPr lang="en-US" sz="1400" b="1" dirty="0">
+                          <a:solidFill>
+                            <a:srgbClr val="888888"/>
+                          </a:solidFill>
+                          <a:latin typeface="Noto Sans TC Black" pitchFamily="34" charset="0"/>
+                          <a:ea typeface="Noto Sans TC Black" pitchFamily="34" charset="-122"/>
+                          <a:cs typeface="Noto Sans TC Black" pitchFamily="34" charset="-120"/>
+                        </a:rPr>
+                        <a:t>C</a:t>
+                      </a:r>
+                      <a:endParaRPr lang="en-US" sz="1400" dirty="0">
+                        <a:latin typeface="Noto Sans TC Black" charset="0"/>
+                        <a:ea typeface="Noto Sans TC Black" charset="0"/>
+                        <a:cs typeface="Noto Sans TC Black" charset="0"/>
+                      </a:endParaRPr>
+                    </a:p>
+                  </a:txBody>
+                  <a:tcPr marL="91440" marR="91440" marT="45720" marB="45720" anchor="ctr">
+                    <a:lnL w="6350" cap="flat" cmpd="sng" algn="ctr">
+                      <a:solidFill>
+                        <a:srgbClr val="E5E5E5"/>
+                      </a:solidFill>
+                      <a:prstDash val="solid"/>
+                      <a:round/>
+                      <a:headEnd type="none" w="med" len="med"/>
+                      <a:tailEnd type="none" w="med" len="med"/>
+                    </a:lnL>
+                    <a:lnR w="6350" cap="flat" cmpd="sng" algn="ctr">
+                      <a:solidFill>
+                        <a:srgbClr val="E5E5E5"/>
+                      </a:solidFill>
+                      <a:prstDash val="solid"/>
+                      <a:round/>
+                      <a:headEnd type="none" w="med" len="med"/>
+                      <a:tailEnd type="none" w="med" len="med"/>
+                    </a:lnR>
+                    <a:lnT w="6350" cap="flat" cmpd="sng" algn="ctr">
+                      <a:solidFill>
+                        <a:srgbClr val="E5E5E5"/>
+                      </a:solidFill>
+                      <a:prstDash val="solid"/>
+                      <a:round/>
+                      <a:headEnd type="none" w="med" len="med"/>
+                      <a:tailEnd type="none" w="med" len="med"/>
+                    </a:lnT>
+                    <a:lnB w="6350" cap="flat" cmpd="sng" algn="ctr">
+                      <a:solidFill>
+                        <a:srgbClr val="E5E5E5"/>
+                      </a:solidFill>
+                      <a:prstDash val="solid"/>
+                      <a:round/>
+                      <a:headEnd type="none" w="med" len="med"/>
+                      <a:tailEnd type="none" w="med" len="med"/>
+                    </a:lnB>
+                    <a:solidFill>
+                      <a:srgbClr val="FFFFFF"/>
+                    </a:solidFill>
+                  </a:tcPr>
+                </a:tc>
+                <a:tc>
+                  <a:txBody>
+                    <a:bodyPr/>
+                    <a:lstStyle/>
+                    <a:p>
+                      <a:pPr algn="ctr" indent="0" marL="0">
+                        <a:buNone/>
+                      </a:pPr>
+                      <a:r>
+                        <a:rPr lang="en-US" sz="1050" dirty="0">
+                          <a:solidFill>
+                            <a:srgbClr val="888888"/>
+                          </a:solidFill>
+                          <a:latin typeface="Noto Sans TC Medium" pitchFamily="34" charset="0"/>
+                          <a:ea typeface="Noto Sans TC Medium" pitchFamily="34" charset="-122"/>
+                          <a:cs typeface="Noto Sans TC Medium" pitchFamily="34" charset="-120"/>
+                        </a:rPr>
+                        <a:t>第 437 名</a:t>
                       </a:r>
                       <a:endParaRPr lang="en-US" sz="1050" dirty="0">
                         <a:latin typeface="Noto Sans TC Medium" charset="0"/>
@@ -9353,7 +10993,7 @@
                           <a:ea typeface="Noto Sans TC Bold" pitchFamily="34" charset="-122"/>
                           <a:cs typeface="Noto Sans TC Bold" pitchFamily="34" charset="-120"/>
                         </a:rPr>
-                        <a:t>成功大學光復第二宿舍站</a:t>
+                        <a:t>全家仁德二仁店站</a:t>
                       </a:r>
                       <a:endParaRPr lang="en-US" sz="1150" dirty="0">
                         <a:latin typeface="Noto Sans TC Bold" charset="0"/>
@@ -9421,7 +11061,7 @@
                           <a:ea typeface="Noto Sans TC Bold" pitchFamily="34" charset="-122"/>
                           <a:cs typeface="Noto Sans TC Bold" pitchFamily="34" charset="-120"/>
                         </a:rPr>
-                        <a:t>700</a:t>
+                        <a:t>5,805</a:t>
                       </a:r>
                       <a:endParaRPr lang="en-US" sz="1200" dirty="0">
                         <a:latin typeface="Noto Sans TC Bold" charset="0"/>
@@ -9627,7 +11267,7 @@
                           <a:ea typeface="Noto Sans TC Medium" pitchFamily="34" charset="-122"/>
                           <a:cs typeface="Noto Sans TC Medium" pitchFamily="34" charset="-120"/>
                         </a:rPr>
-                        <a:t>第 521 名</a:t>
+                        <a:t>第 394 名</a:t>
                       </a:r>
                       <a:endParaRPr lang="en-US" sz="1050" dirty="0">
                         <a:latin typeface="Noto Sans TC Medium" charset="0"/>
@@ -9695,7 +11335,7 @@
                           <a:ea typeface="Noto Sans TC Medium" pitchFamily="34" charset="-122"/>
                           <a:cs typeface="Noto Sans TC Medium" pitchFamily="34" charset="-120"/>
                         </a:rPr>
-                        <a:t>臺南</a:t>
+                        <a:t>雲林</a:t>
                       </a:r>
                       <a:endParaRPr lang="en-US" sz="1100" dirty="0">
                         <a:latin typeface="Noto Sans TC Medium" charset="0"/>
@@ -9763,7 +11403,7 @@
                           <a:ea typeface="Noto Sans TC Bold" pitchFamily="34" charset="-122"/>
                           <a:cs typeface="Noto Sans TC Bold" pitchFamily="34" charset="-120"/>
                         </a:rPr>
-                        <a:t>成功大學芸青軒學生活動中心(二)站</a:t>
+                        <a:t>小北百貨高雄中正店站</a:t>
                       </a:r>
                       <a:endParaRPr lang="en-US" sz="1150" dirty="0">
                         <a:latin typeface="Noto Sans TC Bold" charset="0"/>
@@ -9831,7 +11471,7 @@
                           <a:ea typeface="Noto Sans TC Bold" pitchFamily="34" charset="-122"/>
                           <a:cs typeface="Noto Sans TC Bold" pitchFamily="34" charset="-120"/>
                         </a:rPr>
-                        <a:t>802</a:t>
+                        <a:t>6,700</a:t>
                       </a:r>
                       <a:endParaRPr lang="en-US" sz="1200" dirty="0">
                         <a:latin typeface="Noto Sans TC Bold" charset="0"/>
@@ -10037,7 +11677,7 @@
                           <a:ea typeface="Noto Sans TC Medium" pitchFamily="34" charset="-122"/>
                           <a:cs typeface="Noto Sans TC Medium" pitchFamily="34" charset="-120"/>
                         </a:rPr>
-                        <a:t>第 523 名</a:t>
+                        <a:t>第 380 名</a:t>
                       </a:r>
                       <a:endParaRPr lang="en-US" sz="1050" dirty="0">
                         <a:latin typeface="Noto Sans TC Medium" charset="0"/>
@@ -10105,7 +11745,7 @@
                           <a:ea typeface="Noto Sans TC Medium" pitchFamily="34" charset="-122"/>
                           <a:cs typeface="Noto Sans TC Medium" pitchFamily="34" charset="-120"/>
                         </a:rPr>
-                        <a:t>雲林</a:t>
+                        <a:t>嘉義</a:t>
                       </a:r>
                       <a:endParaRPr lang="en-US" sz="1100" dirty="0">
                         <a:latin typeface="Noto Sans TC Medium" charset="0"/>
@@ -10173,7 +11813,7 @@
                           <a:ea typeface="Noto Sans TC Bold" pitchFamily="34" charset="-122"/>
                           <a:cs typeface="Noto Sans TC Bold" pitchFamily="34" charset="-120"/>
                         </a:rPr>
-                        <a:t>全聯福利中心林內中正店站</a:t>
+                        <a:t>全聯福利中心嘉義湖子內店站</a:t>
                       </a:r>
                       <a:endParaRPr lang="en-US" sz="1150" dirty="0">
                         <a:latin typeface="Noto Sans TC Bold" charset="0"/>
@@ -10241,7 +11881,7 @@
                           <a:ea typeface="Noto Sans TC Bold" pitchFamily="34" charset="-122"/>
                           <a:cs typeface="Noto Sans TC Bold" pitchFamily="34" charset="-120"/>
                         </a:rPr>
-                        <a:t>1,063</a:t>
+                        <a:t>6,942</a:t>
                       </a:r>
                       <a:endParaRPr lang="en-US" sz="1200" dirty="0">
                         <a:latin typeface="Noto Sans TC Bold" charset="0"/>
@@ -10447,1647 +12087,7 @@
                           <a:ea typeface="Noto Sans TC Medium" pitchFamily="34" charset="-122"/>
                           <a:cs typeface="Noto Sans TC Medium" pitchFamily="34" charset="-120"/>
                         </a:rPr>
-                        <a:t>第 520 名</a:t>
-                      </a:r>
-                      <a:endParaRPr lang="en-US" sz="1050" dirty="0">
-                        <a:latin typeface="Noto Sans TC Medium" charset="0"/>
-                        <a:ea typeface="Noto Sans TC Medium" charset="0"/>
-                        <a:cs typeface="Noto Sans TC Medium" charset="0"/>
-                      </a:endParaRPr>
-                    </a:p>
-                  </a:txBody>
-                  <a:tcPr marL="91440" marR="91440" marT="45720" marB="45720" anchor="ctr">
-                    <a:lnL w="6350" cap="flat" cmpd="sng" algn="ctr">
-                      <a:solidFill>
-                        <a:srgbClr val="E5E5E5"/>
-                      </a:solidFill>
-                      <a:prstDash val="solid"/>
-                      <a:round/>
-                      <a:headEnd type="none" w="med" len="med"/>
-                      <a:tailEnd type="none" w="med" len="med"/>
-                    </a:lnL>
-                    <a:lnR w="6350" cap="flat" cmpd="sng" algn="ctr">
-                      <a:solidFill>
-                        <a:srgbClr val="E5E5E5"/>
-                      </a:solidFill>
-                      <a:prstDash val="solid"/>
-                      <a:round/>
-                      <a:headEnd type="none" w="med" len="med"/>
-                      <a:tailEnd type="none" w="med" len="med"/>
-                    </a:lnR>
-                    <a:lnT w="6350" cap="flat" cmpd="sng" algn="ctr">
-                      <a:solidFill>
-                        <a:srgbClr val="E5E5E5"/>
-                      </a:solidFill>
-                      <a:prstDash val="solid"/>
-                      <a:round/>
-                      <a:headEnd type="none" w="med" len="med"/>
-                      <a:tailEnd type="none" w="med" len="med"/>
-                    </a:lnT>
-                    <a:lnB w="6350" cap="flat" cmpd="sng" algn="ctr">
-                      <a:solidFill>
-                        <a:srgbClr val="E5E5E5"/>
-                      </a:solidFill>
-                      <a:prstDash val="solid"/>
-                      <a:round/>
-                      <a:headEnd type="none" w="med" len="med"/>
-                      <a:tailEnd type="none" w="med" len="med"/>
-                    </a:lnB>
-                    <a:solidFill>
-                      <a:srgbClr val="F7F7F9"/>
-                    </a:solidFill>
-                  </a:tcPr>
-                </a:tc>
-                <a:tc>
-                  <a:txBody>
-                    <a:bodyPr/>
-                    <a:lstStyle/>
-                    <a:p>
-                      <a:pPr algn="ctr" indent="0" marL="0">
-                        <a:buNone/>
-                      </a:pPr>
-                      <a:r>
-                        <a:rPr lang="en-US" sz="1100" dirty="0">
-                          <a:solidFill>
-                            <a:srgbClr val="333333"/>
-                          </a:solidFill>
-                          <a:latin typeface="Noto Sans TC Medium" pitchFamily="34" charset="0"/>
-                          <a:ea typeface="Noto Sans TC Medium" pitchFamily="34" charset="-122"/>
-                          <a:cs typeface="Noto Sans TC Medium" pitchFamily="34" charset="-120"/>
-                        </a:rPr>
-                        <a:t>臺南</a:t>
-                      </a:r>
-                      <a:endParaRPr lang="en-US" sz="1100" dirty="0">
-                        <a:latin typeface="Noto Sans TC Medium" charset="0"/>
-                        <a:ea typeface="Noto Sans TC Medium" charset="0"/>
-                        <a:cs typeface="Noto Sans TC Medium" charset="0"/>
-                      </a:endParaRPr>
-                    </a:p>
-                  </a:txBody>
-                  <a:tcPr marL="91440" marR="91440" marT="45720" marB="45720" anchor="ctr">
-                    <a:lnL w="6350" cap="flat" cmpd="sng" algn="ctr">
-                      <a:solidFill>
-                        <a:srgbClr val="E5E5E5"/>
-                      </a:solidFill>
-                      <a:prstDash val="solid"/>
-                      <a:round/>
-                      <a:headEnd type="none" w="med" len="med"/>
-                      <a:tailEnd type="none" w="med" len="med"/>
-                    </a:lnL>
-                    <a:lnR w="6350" cap="flat" cmpd="sng" algn="ctr">
-                      <a:solidFill>
-                        <a:srgbClr val="E5E5E5"/>
-                      </a:solidFill>
-                      <a:prstDash val="solid"/>
-                      <a:round/>
-                      <a:headEnd type="none" w="med" len="med"/>
-                      <a:tailEnd type="none" w="med" len="med"/>
-                    </a:lnR>
-                    <a:lnT w="6350" cap="flat" cmpd="sng" algn="ctr">
-                      <a:solidFill>
-                        <a:srgbClr val="E5E5E5"/>
-                      </a:solidFill>
-                      <a:prstDash val="solid"/>
-                      <a:round/>
-                      <a:headEnd type="none" w="med" len="med"/>
-                      <a:tailEnd type="none" w="med" len="med"/>
-                    </a:lnT>
-                    <a:lnB w="6350" cap="flat" cmpd="sng" algn="ctr">
-                      <a:solidFill>
-                        <a:srgbClr val="E5E5E5"/>
-                      </a:solidFill>
-                      <a:prstDash val="solid"/>
-                      <a:round/>
-                      <a:headEnd type="none" w="med" len="med"/>
-                      <a:tailEnd type="none" w="med" len="med"/>
-                    </a:lnB>
-                    <a:solidFill>
-                      <a:srgbClr val="F7F7F9"/>
-                    </a:solidFill>
-                  </a:tcPr>
-                </a:tc>
-                <a:tc>
-                  <a:txBody>
-                    <a:bodyPr/>
-                    <a:lstStyle/>
-                    <a:p>
-                      <a:pPr algn="l" indent="0" marL="0">
-                        <a:buNone/>
-                      </a:pPr>
-                      <a:r>
-                        <a:rPr lang="en-US" sz="1150" b="1" dirty="0">
-                          <a:solidFill>
-                            <a:srgbClr val="333333"/>
-                          </a:solidFill>
-                          <a:latin typeface="Noto Sans TC Bold" pitchFamily="34" charset="0"/>
-                          <a:ea typeface="Noto Sans TC Bold" pitchFamily="34" charset="-122"/>
-                          <a:cs typeface="Noto Sans TC Bold" pitchFamily="34" charset="-120"/>
-                        </a:rPr>
-                        <a:t>成功大學學生活動中心(一)站</a:t>
-                      </a:r>
-                      <a:endParaRPr lang="en-US" sz="1150" dirty="0">
-                        <a:latin typeface="Noto Sans TC Bold" charset="0"/>
-                        <a:ea typeface="Noto Sans TC Bold" charset="0"/>
-                        <a:cs typeface="Noto Sans TC Bold" charset="0"/>
-                      </a:endParaRPr>
-                    </a:p>
-                  </a:txBody>
-                  <a:tcPr marL="91440" marR="91440" marT="45720" marB="45720" anchor="ctr">
-                    <a:lnL w="6350" cap="flat" cmpd="sng" algn="ctr">
-                      <a:solidFill>
-                        <a:srgbClr val="E5E5E5"/>
-                      </a:solidFill>
-                      <a:prstDash val="solid"/>
-                      <a:round/>
-                      <a:headEnd type="none" w="med" len="med"/>
-                      <a:tailEnd type="none" w="med" len="med"/>
-                    </a:lnL>
-                    <a:lnR w="6350" cap="flat" cmpd="sng" algn="ctr">
-                      <a:solidFill>
-                        <a:srgbClr val="E5E5E5"/>
-                      </a:solidFill>
-                      <a:prstDash val="solid"/>
-                      <a:round/>
-                      <a:headEnd type="none" w="med" len="med"/>
-                      <a:tailEnd type="none" w="med" len="med"/>
-                    </a:lnR>
-                    <a:lnT w="6350" cap="flat" cmpd="sng" algn="ctr">
-                      <a:solidFill>
-                        <a:srgbClr val="E5E5E5"/>
-                      </a:solidFill>
-                      <a:prstDash val="solid"/>
-                      <a:round/>
-                      <a:headEnd type="none" w="med" len="med"/>
-                      <a:tailEnd type="none" w="med" len="med"/>
-                    </a:lnT>
-                    <a:lnB w="6350" cap="flat" cmpd="sng" algn="ctr">
-                      <a:solidFill>
-                        <a:srgbClr val="E5E5E5"/>
-                      </a:solidFill>
-                      <a:prstDash val="solid"/>
-                      <a:round/>
-                      <a:headEnd type="none" w="med" len="med"/>
-                      <a:tailEnd type="none" w="med" len="med"/>
-                    </a:lnB>
-                    <a:solidFill>
-                      <a:srgbClr val="F7F7F9"/>
-                    </a:solidFill>
-                  </a:tcPr>
-                </a:tc>
-                <a:tc>
-                  <a:txBody>
-                    <a:bodyPr/>
-                    <a:lstStyle/>
-                    <a:p>
-                      <a:pPr algn="ctr" indent="0" marL="0">
-                        <a:buNone/>
-                      </a:pPr>
-                      <a:r>
-                        <a:rPr lang="en-US" sz="1200" b="1" dirty="0">
-                          <a:solidFill>
-                            <a:srgbClr val="0076A9"/>
-                          </a:solidFill>
-                          <a:latin typeface="Noto Sans TC Bold" pitchFamily="34" charset="0"/>
-                          <a:ea typeface="Noto Sans TC Bold" pitchFamily="34" charset="-122"/>
-                          <a:cs typeface="Noto Sans TC Bold" pitchFamily="34" charset="-120"/>
-                        </a:rPr>
-                        <a:t>1,136</a:t>
-                      </a:r>
-                      <a:endParaRPr lang="en-US" sz="1200" dirty="0">
-                        <a:latin typeface="Noto Sans TC Bold" charset="0"/>
-                        <a:ea typeface="Noto Sans TC Bold" charset="0"/>
-                        <a:cs typeface="Noto Sans TC Bold" charset="0"/>
-                      </a:endParaRPr>
-                    </a:p>
-                  </a:txBody>
-                  <a:tcPr marL="91440" marR="91440" marT="45720" marB="45720" anchor="ctr">
-                    <a:lnL w="6350" cap="flat" cmpd="sng" algn="ctr">
-                      <a:solidFill>
-                        <a:srgbClr val="E5E5E5"/>
-                      </a:solidFill>
-                      <a:prstDash val="solid"/>
-                      <a:round/>
-                      <a:headEnd type="none" w="med" len="med"/>
-                      <a:tailEnd type="none" w="med" len="med"/>
-                    </a:lnL>
-                    <a:lnR w="6350" cap="flat" cmpd="sng" algn="ctr">
-                      <a:solidFill>
-                        <a:srgbClr val="E5E5E5"/>
-                      </a:solidFill>
-                      <a:prstDash val="solid"/>
-                      <a:round/>
-                      <a:headEnd type="none" w="med" len="med"/>
-                      <a:tailEnd type="none" w="med" len="med"/>
-                    </a:lnR>
-                    <a:lnT w="6350" cap="flat" cmpd="sng" algn="ctr">
-                      <a:solidFill>
-                        <a:srgbClr val="E5E5E5"/>
-                      </a:solidFill>
-                      <a:prstDash val="solid"/>
-                      <a:round/>
-                      <a:headEnd type="none" w="med" len="med"/>
-                      <a:tailEnd type="none" w="med" len="med"/>
-                    </a:lnT>
-                    <a:lnB w="6350" cap="flat" cmpd="sng" algn="ctr">
-                      <a:solidFill>
-                        <a:srgbClr val="E5E5E5"/>
-                      </a:solidFill>
-                      <a:prstDash val="solid"/>
-                      <a:round/>
-                      <a:headEnd type="none" w="med" len="med"/>
-                      <a:tailEnd type="none" w="med" len="med"/>
-                    </a:lnB>
-                    <a:solidFill>
-                      <a:srgbClr val="F7F7F9"/>
-                    </a:solidFill>
-                  </a:tcPr>
-                </a:tc>
-                <a:tc>
-                  <a:txBody>
-                    <a:bodyPr/>
-                    <a:lstStyle/>
-                    <a:p>
-                      <a:pPr algn="ctr" indent="0" marL="0">
-                        <a:buNone/>
-                      </a:pPr>
-                      <a:r>
-                        <a:rPr lang="en-US" sz="950" dirty="0">
-                          <a:solidFill>
-                            <a:srgbClr val="888888"/>
-                          </a:solidFill>
-                          <a:latin typeface="Noto Sans TC Medium" pitchFamily="34" charset="0"/>
-                          <a:ea typeface="Noto Sans TC Medium" pitchFamily="34" charset="-122"/>
-                          <a:cs typeface="Noto Sans TC Medium" pitchFamily="34" charset="-120"/>
-                        </a:rPr>
-                        <a:t>－（首次記錄）</a:t>
-                      </a:r>
-                      <a:endParaRPr lang="en-US" sz="950" dirty="0">
-                        <a:latin typeface="Noto Sans TC Medium" charset="0"/>
-                        <a:ea typeface="Noto Sans TC Medium" charset="0"/>
-                        <a:cs typeface="Noto Sans TC Medium" charset="0"/>
-                      </a:endParaRPr>
-                    </a:p>
-                  </a:txBody>
-                  <a:tcPr marL="91440" marR="91440" marT="45720" marB="45720" anchor="ctr">
-                    <a:lnL w="6350" cap="flat" cmpd="sng" algn="ctr">
-                      <a:solidFill>
-                        <a:srgbClr val="E5E5E5"/>
-                      </a:solidFill>
-                      <a:prstDash val="solid"/>
-                      <a:round/>
-                      <a:headEnd type="none" w="med" len="med"/>
-                      <a:tailEnd type="none" w="med" len="med"/>
-                    </a:lnL>
-                    <a:lnR w="6350" cap="flat" cmpd="sng" algn="ctr">
-                      <a:solidFill>
-                        <a:srgbClr val="E5E5E5"/>
-                      </a:solidFill>
-                      <a:prstDash val="solid"/>
-                      <a:round/>
-                      <a:headEnd type="none" w="med" len="med"/>
-                      <a:tailEnd type="none" w="med" len="med"/>
-                    </a:lnR>
-                    <a:lnT w="6350" cap="flat" cmpd="sng" algn="ctr">
-                      <a:solidFill>
-                        <a:srgbClr val="E5E5E5"/>
-                      </a:solidFill>
-                      <a:prstDash val="solid"/>
-                      <a:round/>
-                      <a:headEnd type="none" w="med" len="med"/>
-                      <a:tailEnd type="none" w="med" len="med"/>
-                    </a:lnT>
-                    <a:lnB w="6350" cap="flat" cmpd="sng" algn="ctr">
-                      <a:solidFill>
-                        <a:srgbClr val="E5E5E5"/>
-                      </a:solidFill>
-                      <a:prstDash val="solid"/>
-                      <a:round/>
-                      <a:headEnd type="none" w="med" len="med"/>
-                      <a:tailEnd type="none" w="med" len="med"/>
-                    </a:lnB>
-                    <a:solidFill>
-                      <a:srgbClr val="F7F7F9"/>
-                    </a:solidFill>
-                  </a:tcPr>
-                </a:tc>
-              </a:tr>
-              <a:tr h="384048">
-                <a:tc>
-                  <a:txBody>
-                    <a:bodyPr/>
-                    <a:lstStyle/>
-                    <a:p>
-                      <a:pPr algn="ctr" indent="0" marL="0">
-                        <a:buNone/>
-                      </a:pPr>
-                      <a:r>
-                        <a:rPr lang="en-US" sz="1400" b="1" dirty="0">
-                          <a:solidFill>
-                            <a:srgbClr val="888888"/>
-                          </a:solidFill>
-                          <a:latin typeface="Noto Sans TC Black" pitchFamily="34" charset="0"/>
-                          <a:ea typeface="Noto Sans TC Black" pitchFamily="34" charset="-122"/>
-                          <a:cs typeface="Noto Sans TC Black" pitchFamily="34" charset="-120"/>
-                        </a:rPr>
-                        <a:t>C</a:t>
-                      </a:r>
-                      <a:endParaRPr lang="en-US" sz="1400" dirty="0">
-                        <a:latin typeface="Noto Sans TC Black" charset="0"/>
-                        <a:ea typeface="Noto Sans TC Black" charset="0"/>
-                        <a:cs typeface="Noto Sans TC Black" charset="0"/>
-                      </a:endParaRPr>
-                    </a:p>
-                  </a:txBody>
-                  <a:tcPr marL="91440" marR="91440" marT="45720" marB="45720" anchor="ctr">
-                    <a:lnL w="6350" cap="flat" cmpd="sng" algn="ctr">
-                      <a:solidFill>
-                        <a:srgbClr val="E5E5E5"/>
-                      </a:solidFill>
-                      <a:prstDash val="solid"/>
-                      <a:round/>
-                      <a:headEnd type="none" w="med" len="med"/>
-                      <a:tailEnd type="none" w="med" len="med"/>
-                    </a:lnL>
-                    <a:lnR w="6350" cap="flat" cmpd="sng" algn="ctr">
-                      <a:solidFill>
-                        <a:srgbClr val="E5E5E5"/>
-                      </a:solidFill>
-                      <a:prstDash val="solid"/>
-                      <a:round/>
-                      <a:headEnd type="none" w="med" len="med"/>
-                      <a:tailEnd type="none" w="med" len="med"/>
-                    </a:lnR>
-                    <a:lnT w="6350" cap="flat" cmpd="sng" algn="ctr">
-                      <a:solidFill>
-                        <a:srgbClr val="E5E5E5"/>
-                      </a:solidFill>
-                      <a:prstDash val="solid"/>
-                      <a:round/>
-                      <a:headEnd type="none" w="med" len="med"/>
-                      <a:tailEnd type="none" w="med" len="med"/>
-                    </a:lnT>
-                    <a:lnB w="6350" cap="flat" cmpd="sng" algn="ctr">
-                      <a:solidFill>
-                        <a:srgbClr val="E5E5E5"/>
-                      </a:solidFill>
-                      <a:prstDash val="solid"/>
-                      <a:round/>
-                      <a:headEnd type="none" w="med" len="med"/>
-                      <a:tailEnd type="none" w="med" len="med"/>
-                    </a:lnB>
-                    <a:solidFill>
-                      <a:srgbClr val="FFFFFF"/>
-                    </a:solidFill>
-                  </a:tcPr>
-                </a:tc>
-                <a:tc>
-                  <a:txBody>
-                    <a:bodyPr/>
-                    <a:lstStyle/>
-                    <a:p>
-                      <a:pPr algn="ctr" indent="0" marL="0">
-                        <a:buNone/>
-                      </a:pPr>
-                      <a:r>
-                        <a:rPr lang="en-US" sz="1050" dirty="0">
-                          <a:solidFill>
-                            <a:srgbClr val="888888"/>
-                          </a:solidFill>
-                          <a:latin typeface="Noto Sans TC Medium" pitchFamily="34" charset="0"/>
-                          <a:ea typeface="Noto Sans TC Medium" pitchFamily="34" charset="-122"/>
-                          <a:cs typeface="Noto Sans TC Medium" pitchFamily="34" charset="-120"/>
-                        </a:rPr>
-                        <a:t>第 492 名</a:t>
-                      </a:r>
-                      <a:endParaRPr lang="en-US" sz="1050" dirty="0">
-                        <a:latin typeface="Noto Sans TC Medium" charset="0"/>
-                        <a:ea typeface="Noto Sans TC Medium" charset="0"/>
-                        <a:cs typeface="Noto Sans TC Medium" charset="0"/>
-                      </a:endParaRPr>
-                    </a:p>
-                  </a:txBody>
-                  <a:tcPr marL="91440" marR="91440" marT="45720" marB="45720" anchor="ctr">
-                    <a:lnL w="6350" cap="flat" cmpd="sng" algn="ctr">
-                      <a:solidFill>
-                        <a:srgbClr val="E5E5E5"/>
-                      </a:solidFill>
-                      <a:prstDash val="solid"/>
-                      <a:round/>
-                      <a:headEnd type="none" w="med" len="med"/>
-                      <a:tailEnd type="none" w="med" len="med"/>
-                    </a:lnL>
-                    <a:lnR w="6350" cap="flat" cmpd="sng" algn="ctr">
-                      <a:solidFill>
-                        <a:srgbClr val="E5E5E5"/>
-                      </a:solidFill>
-                      <a:prstDash val="solid"/>
-                      <a:round/>
-                      <a:headEnd type="none" w="med" len="med"/>
-                      <a:tailEnd type="none" w="med" len="med"/>
-                    </a:lnR>
-                    <a:lnT w="6350" cap="flat" cmpd="sng" algn="ctr">
-                      <a:solidFill>
-                        <a:srgbClr val="E5E5E5"/>
-                      </a:solidFill>
-                      <a:prstDash val="solid"/>
-                      <a:round/>
-                      <a:headEnd type="none" w="med" len="med"/>
-                      <a:tailEnd type="none" w="med" len="med"/>
-                    </a:lnT>
-                    <a:lnB w="6350" cap="flat" cmpd="sng" algn="ctr">
-                      <a:solidFill>
-                        <a:srgbClr val="E5E5E5"/>
-                      </a:solidFill>
-                      <a:prstDash val="solid"/>
-                      <a:round/>
-                      <a:headEnd type="none" w="med" len="med"/>
-                      <a:tailEnd type="none" w="med" len="med"/>
-                    </a:lnB>
-                    <a:solidFill>
-                      <a:srgbClr val="FFFFFF"/>
-                    </a:solidFill>
-                  </a:tcPr>
-                </a:tc>
-                <a:tc>
-                  <a:txBody>
-                    <a:bodyPr/>
-                    <a:lstStyle/>
-                    <a:p>
-                      <a:pPr algn="ctr" indent="0" marL="0">
-                        <a:buNone/>
-                      </a:pPr>
-                      <a:r>
-                        <a:rPr lang="en-US" sz="1100" dirty="0">
-                          <a:solidFill>
-                            <a:srgbClr val="333333"/>
-                          </a:solidFill>
-                          <a:latin typeface="Noto Sans TC Medium" pitchFamily="34" charset="0"/>
-                          <a:ea typeface="Noto Sans TC Medium" pitchFamily="34" charset="-122"/>
-                          <a:cs typeface="Noto Sans TC Medium" pitchFamily="34" charset="-120"/>
-                        </a:rPr>
-                        <a:t>臺南</a:t>
-                      </a:r>
-                      <a:endParaRPr lang="en-US" sz="1100" dirty="0">
-                        <a:latin typeface="Noto Sans TC Medium" charset="0"/>
-                        <a:ea typeface="Noto Sans TC Medium" charset="0"/>
-                        <a:cs typeface="Noto Sans TC Medium" charset="0"/>
-                      </a:endParaRPr>
-                    </a:p>
-                  </a:txBody>
-                  <a:tcPr marL="91440" marR="91440" marT="45720" marB="45720" anchor="ctr">
-                    <a:lnL w="6350" cap="flat" cmpd="sng" algn="ctr">
-                      <a:solidFill>
-                        <a:srgbClr val="E5E5E5"/>
-                      </a:solidFill>
-                      <a:prstDash val="solid"/>
-                      <a:round/>
-                      <a:headEnd type="none" w="med" len="med"/>
-                      <a:tailEnd type="none" w="med" len="med"/>
-                    </a:lnL>
-                    <a:lnR w="6350" cap="flat" cmpd="sng" algn="ctr">
-                      <a:solidFill>
-                        <a:srgbClr val="E5E5E5"/>
-                      </a:solidFill>
-                      <a:prstDash val="solid"/>
-                      <a:round/>
-                      <a:headEnd type="none" w="med" len="med"/>
-                      <a:tailEnd type="none" w="med" len="med"/>
-                    </a:lnR>
-                    <a:lnT w="6350" cap="flat" cmpd="sng" algn="ctr">
-                      <a:solidFill>
-                        <a:srgbClr val="E5E5E5"/>
-                      </a:solidFill>
-                      <a:prstDash val="solid"/>
-                      <a:round/>
-                      <a:headEnd type="none" w="med" len="med"/>
-                      <a:tailEnd type="none" w="med" len="med"/>
-                    </a:lnT>
-                    <a:lnB w="6350" cap="flat" cmpd="sng" algn="ctr">
-                      <a:solidFill>
-                        <a:srgbClr val="E5E5E5"/>
-                      </a:solidFill>
-                      <a:prstDash val="solid"/>
-                      <a:round/>
-                      <a:headEnd type="none" w="med" len="med"/>
-                      <a:tailEnd type="none" w="med" len="med"/>
-                    </a:lnB>
-                    <a:solidFill>
-                      <a:srgbClr val="FFFFFF"/>
-                    </a:solidFill>
-                  </a:tcPr>
-                </a:tc>
-                <a:tc>
-                  <a:txBody>
-                    <a:bodyPr/>
-                    <a:lstStyle/>
-                    <a:p>
-                      <a:pPr algn="l" indent="0" marL="0">
-                        <a:buNone/>
-                      </a:pPr>
-                      <a:r>
-                        <a:rPr lang="en-US" sz="1150" b="1" dirty="0">
-                          <a:solidFill>
-                            <a:srgbClr val="333333"/>
-                          </a:solidFill>
-                          <a:latin typeface="Noto Sans TC Bold" pitchFamily="34" charset="0"/>
-                          <a:ea typeface="Noto Sans TC Bold" pitchFamily="34" charset="-122"/>
-                          <a:cs typeface="Noto Sans TC Bold" pitchFamily="34" charset="-120"/>
-                        </a:rPr>
-                        <a:t>豐譽億載安居站</a:t>
-                      </a:r>
-                      <a:endParaRPr lang="en-US" sz="1150" dirty="0">
-                        <a:latin typeface="Noto Sans TC Bold" charset="0"/>
-                        <a:ea typeface="Noto Sans TC Bold" charset="0"/>
-                        <a:cs typeface="Noto Sans TC Bold" charset="0"/>
-                      </a:endParaRPr>
-                    </a:p>
-                  </a:txBody>
-                  <a:tcPr marL="91440" marR="91440" marT="45720" marB="45720" anchor="ctr">
-                    <a:lnL w="6350" cap="flat" cmpd="sng" algn="ctr">
-                      <a:solidFill>
-                        <a:srgbClr val="E5E5E5"/>
-                      </a:solidFill>
-                      <a:prstDash val="solid"/>
-                      <a:round/>
-                      <a:headEnd type="none" w="med" len="med"/>
-                      <a:tailEnd type="none" w="med" len="med"/>
-                    </a:lnL>
-                    <a:lnR w="6350" cap="flat" cmpd="sng" algn="ctr">
-                      <a:solidFill>
-                        <a:srgbClr val="E5E5E5"/>
-                      </a:solidFill>
-                      <a:prstDash val="solid"/>
-                      <a:round/>
-                      <a:headEnd type="none" w="med" len="med"/>
-                      <a:tailEnd type="none" w="med" len="med"/>
-                    </a:lnR>
-                    <a:lnT w="6350" cap="flat" cmpd="sng" algn="ctr">
-                      <a:solidFill>
-                        <a:srgbClr val="E5E5E5"/>
-                      </a:solidFill>
-                      <a:prstDash val="solid"/>
-                      <a:round/>
-                      <a:headEnd type="none" w="med" len="med"/>
-                      <a:tailEnd type="none" w="med" len="med"/>
-                    </a:lnT>
-                    <a:lnB w="6350" cap="flat" cmpd="sng" algn="ctr">
-                      <a:solidFill>
-                        <a:srgbClr val="E5E5E5"/>
-                      </a:solidFill>
-                      <a:prstDash val="solid"/>
-                      <a:round/>
-                      <a:headEnd type="none" w="med" len="med"/>
-                      <a:tailEnd type="none" w="med" len="med"/>
-                    </a:lnB>
-                    <a:solidFill>
-                      <a:srgbClr val="FFFFFF"/>
-                    </a:solidFill>
-                  </a:tcPr>
-                </a:tc>
-                <a:tc>
-                  <a:txBody>
-                    <a:bodyPr/>
-                    <a:lstStyle/>
-                    <a:p>
-                      <a:pPr algn="ctr" indent="0" marL="0">
-                        <a:buNone/>
-                      </a:pPr>
-                      <a:r>
-                        <a:rPr lang="en-US" sz="1200" b="1" dirty="0">
-                          <a:solidFill>
-                            <a:srgbClr val="0076A9"/>
-                          </a:solidFill>
-                          <a:latin typeface="Noto Sans TC Bold" pitchFamily="34" charset="0"/>
-                          <a:ea typeface="Noto Sans TC Bold" pitchFamily="34" charset="-122"/>
-                          <a:cs typeface="Noto Sans TC Bold" pitchFamily="34" charset="-120"/>
-                        </a:rPr>
-                        <a:t>1,321</a:t>
-                      </a:r>
-                      <a:endParaRPr lang="en-US" sz="1200" dirty="0">
-                        <a:latin typeface="Noto Sans TC Bold" charset="0"/>
-                        <a:ea typeface="Noto Sans TC Bold" charset="0"/>
-                        <a:cs typeface="Noto Sans TC Bold" charset="0"/>
-                      </a:endParaRPr>
-                    </a:p>
-                  </a:txBody>
-                  <a:tcPr marL="91440" marR="91440" marT="45720" marB="45720" anchor="ctr">
-                    <a:lnL w="6350" cap="flat" cmpd="sng" algn="ctr">
-                      <a:solidFill>
-                        <a:srgbClr val="E5E5E5"/>
-                      </a:solidFill>
-                      <a:prstDash val="solid"/>
-                      <a:round/>
-                      <a:headEnd type="none" w="med" len="med"/>
-                      <a:tailEnd type="none" w="med" len="med"/>
-                    </a:lnL>
-                    <a:lnR w="6350" cap="flat" cmpd="sng" algn="ctr">
-                      <a:solidFill>
-                        <a:srgbClr val="E5E5E5"/>
-                      </a:solidFill>
-                      <a:prstDash val="solid"/>
-                      <a:round/>
-                      <a:headEnd type="none" w="med" len="med"/>
-                      <a:tailEnd type="none" w="med" len="med"/>
-                    </a:lnR>
-                    <a:lnT w="6350" cap="flat" cmpd="sng" algn="ctr">
-                      <a:solidFill>
-                        <a:srgbClr val="E5E5E5"/>
-                      </a:solidFill>
-                      <a:prstDash val="solid"/>
-                      <a:round/>
-                      <a:headEnd type="none" w="med" len="med"/>
-                      <a:tailEnd type="none" w="med" len="med"/>
-                    </a:lnT>
-                    <a:lnB w="6350" cap="flat" cmpd="sng" algn="ctr">
-                      <a:solidFill>
-                        <a:srgbClr val="E5E5E5"/>
-                      </a:solidFill>
-                      <a:prstDash val="solid"/>
-                      <a:round/>
-                      <a:headEnd type="none" w="med" len="med"/>
-                      <a:tailEnd type="none" w="med" len="med"/>
-                    </a:lnB>
-                    <a:solidFill>
-                      <a:srgbClr val="FFFFFF"/>
-                    </a:solidFill>
-                  </a:tcPr>
-                </a:tc>
-                <a:tc>
-                  <a:txBody>
-                    <a:bodyPr/>
-                    <a:lstStyle/>
-                    <a:p>
-                      <a:pPr algn="ctr" indent="0" marL="0">
-                        <a:buNone/>
-                      </a:pPr>
-                      <a:r>
-                        <a:rPr lang="en-US" sz="950" dirty="0">
-                          <a:solidFill>
-                            <a:srgbClr val="888888"/>
-                          </a:solidFill>
-                          <a:latin typeface="Noto Sans TC Medium" pitchFamily="34" charset="0"/>
-                          <a:ea typeface="Noto Sans TC Medium" pitchFamily="34" charset="-122"/>
-                          <a:cs typeface="Noto Sans TC Medium" pitchFamily="34" charset="-120"/>
-                        </a:rPr>
-                        <a:t>－（首次記錄）</a:t>
-                      </a:r>
-                      <a:endParaRPr lang="en-US" sz="950" dirty="0">
-                        <a:latin typeface="Noto Sans TC Medium" charset="0"/>
-                        <a:ea typeface="Noto Sans TC Medium" charset="0"/>
-                        <a:cs typeface="Noto Sans TC Medium" charset="0"/>
-                      </a:endParaRPr>
-                    </a:p>
-                  </a:txBody>
-                  <a:tcPr marL="91440" marR="91440" marT="45720" marB="45720" anchor="ctr">
-                    <a:lnL w="6350" cap="flat" cmpd="sng" algn="ctr">
-                      <a:solidFill>
-                        <a:srgbClr val="E5E5E5"/>
-                      </a:solidFill>
-                      <a:prstDash val="solid"/>
-                      <a:round/>
-                      <a:headEnd type="none" w="med" len="med"/>
-                      <a:tailEnd type="none" w="med" len="med"/>
-                    </a:lnL>
-                    <a:lnR w="6350" cap="flat" cmpd="sng" algn="ctr">
-                      <a:solidFill>
-                        <a:srgbClr val="E5E5E5"/>
-                      </a:solidFill>
-                      <a:prstDash val="solid"/>
-                      <a:round/>
-                      <a:headEnd type="none" w="med" len="med"/>
-                      <a:tailEnd type="none" w="med" len="med"/>
-                    </a:lnR>
-                    <a:lnT w="6350" cap="flat" cmpd="sng" algn="ctr">
-                      <a:solidFill>
-                        <a:srgbClr val="E5E5E5"/>
-                      </a:solidFill>
-                      <a:prstDash val="solid"/>
-                      <a:round/>
-                      <a:headEnd type="none" w="med" len="med"/>
-                      <a:tailEnd type="none" w="med" len="med"/>
-                    </a:lnT>
-                    <a:lnB w="6350" cap="flat" cmpd="sng" algn="ctr">
-                      <a:solidFill>
-                        <a:srgbClr val="E5E5E5"/>
-                      </a:solidFill>
-                      <a:prstDash val="solid"/>
-                      <a:round/>
-                      <a:headEnd type="none" w="med" len="med"/>
-                      <a:tailEnd type="none" w="med" len="med"/>
-                    </a:lnB>
-                    <a:solidFill>
-                      <a:srgbClr val="FFFFFF"/>
-                    </a:solidFill>
-                  </a:tcPr>
-                </a:tc>
-              </a:tr>
-              <a:tr h="384048">
-                <a:tc>
-                  <a:txBody>
-                    <a:bodyPr/>
-                    <a:lstStyle/>
-                    <a:p>
-                      <a:pPr algn="ctr" indent="0" marL="0">
-                        <a:buNone/>
-                      </a:pPr>
-                      <a:r>
-                        <a:rPr lang="en-US" sz="1400" b="1" dirty="0">
-                          <a:solidFill>
-                            <a:srgbClr val="888888"/>
-                          </a:solidFill>
-                          <a:latin typeface="Noto Sans TC Black" pitchFamily="34" charset="0"/>
-                          <a:ea typeface="Noto Sans TC Black" pitchFamily="34" charset="-122"/>
-                          <a:cs typeface="Noto Sans TC Black" pitchFamily="34" charset="-120"/>
-                        </a:rPr>
-                        <a:t>C</a:t>
-                      </a:r>
-                      <a:endParaRPr lang="en-US" sz="1400" dirty="0">
-                        <a:latin typeface="Noto Sans TC Black" charset="0"/>
-                        <a:ea typeface="Noto Sans TC Black" charset="0"/>
-                        <a:cs typeface="Noto Sans TC Black" charset="0"/>
-                      </a:endParaRPr>
-                    </a:p>
-                  </a:txBody>
-                  <a:tcPr marL="91440" marR="91440" marT="45720" marB="45720" anchor="ctr">
-                    <a:lnL w="6350" cap="flat" cmpd="sng" algn="ctr">
-                      <a:solidFill>
-                        <a:srgbClr val="E5E5E5"/>
-                      </a:solidFill>
-                      <a:prstDash val="solid"/>
-                      <a:round/>
-                      <a:headEnd type="none" w="med" len="med"/>
-                      <a:tailEnd type="none" w="med" len="med"/>
-                    </a:lnL>
-                    <a:lnR w="6350" cap="flat" cmpd="sng" algn="ctr">
-                      <a:solidFill>
-                        <a:srgbClr val="E5E5E5"/>
-                      </a:solidFill>
-                      <a:prstDash val="solid"/>
-                      <a:round/>
-                      <a:headEnd type="none" w="med" len="med"/>
-                      <a:tailEnd type="none" w="med" len="med"/>
-                    </a:lnR>
-                    <a:lnT w="6350" cap="flat" cmpd="sng" algn="ctr">
-                      <a:solidFill>
-                        <a:srgbClr val="E5E5E5"/>
-                      </a:solidFill>
-                      <a:prstDash val="solid"/>
-                      <a:round/>
-                      <a:headEnd type="none" w="med" len="med"/>
-                      <a:tailEnd type="none" w="med" len="med"/>
-                    </a:lnT>
-                    <a:lnB w="6350" cap="flat" cmpd="sng" algn="ctr">
-                      <a:solidFill>
-                        <a:srgbClr val="E5E5E5"/>
-                      </a:solidFill>
-                      <a:prstDash val="solid"/>
-                      <a:round/>
-                      <a:headEnd type="none" w="med" len="med"/>
-                      <a:tailEnd type="none" w="med" len="med"/>
-                    </a:lnB>
-                    <a:solidFill>
-                      <a:srgbClr val="F7F7F9"/>
-                    </a:solidFill>
-                  </a:tcPr>
-                </a:tc>
-                <a:tc>
-                  <a:txBody>
-                    <a:bodyPr/>
-                    <a:lstStyle/>
-                    <a:p>
-                      <a:pPr algn="ctr" indent="0" marL="0">
-                        <a:buNone/>
-                      </a:pPr>
-                      <a:r>
-                        <a:rPr lang="en-US" sz="1050" dirty="0">
-                          <a:solidFill>
-                            <a:srgbClr val="888888"/>
-                          </a:solidFill>
-                          <a:latin typeface="Noto Sans TC Medium" pitchFamily="34" charset="0"/>
-                          <a:ea typeface="Noto Sans TC Medium" pitchFamily="34" charset="-122"/>
-                          <a:cs typeface="Noto Sans TC Medium" pitchFamily="34" charset="-120"/>
-                        </a:rPr>
-                        <a:t>第 511 名</a:t>
-                      </a:r>
-                      <a:endParaRPr lang="en-US" sz="1050" dirty="0">
-                        <a:latin typeface="Noto Sans TC Medium" charset="0"/>
-                        <a:ea typeface="Noto Sans TC Medium" charset="0"/>
-                        <a:cs typeface="Noto Sans TC Medium" charset="0"/>
-                      </a:endParaRPr>
-                    </a:p>
-                  </a:txBody>
-                  <a:tcPr marL="91440" marR="91440" marT="45720" marB="45720" anchor="ctr">
-                    <a:lnL w="6350" cap="flat" cmpd="sng" algn="ctr">
-                      <a:solidFill>
-                        <a:srgbClr val="E5E5E5"/>
-                      </a:solidFill>
-                      <a:prstDash val="solid"/>
-                      <a:round/>
-                      <a:headEnd type="none" w="med" len="med"/>
-                      <a:tailEnd type="none" w="med" len="med"/>
-                    </a:lnL>
-                    <a:lnR w="6350" cap="flat" cmpd="sng" algn="ctr">
-                      <a:solidFill>
-                        <a:srgbClr val="E5E5E5"/>
-                      </a:solidFill>
-                      <a:prstDash val="solid"/>
-                      <a:round/>
-                      <a:headEnd type="none" w="med" len="med"/>
-                      <a:tailEnd type="none" w="med" len="med"/>
-                    </a:lnR>
-                    <a:lnT w="6350" cap="flat" cmpd="sng" algn="ctr">
-                      <a:solidFill>
-                        <a:srgbClr val="E5E5E5"/>
-                      </a:solidFill>
-                      <a:prstDash val="solid"/>
-                      <a:round/>
-                      <a:headEnd type="none" w="med" len="med"/>
-                      <a:tailEnd type="none" w="med" len="med"/>
-                    </a:lnT>
-                    <a:lnB w="6350" cap="flat" cmpd="sng" algn="ctr">
-                      <a:solidFill>
-                        <a:srgbClr val="E5E5E5"/>
-                      </a:solidFill>
-                      <a:prstDash val="solid"/>
-                      <a:round/>
-                      <a:headEnd type="none" w="med" len="med"/>
-                      <a:tailEnd type="none" w="med" len="med"/>
-                    </a:lnB>
-                    <a:solidFill>
-                      <a:srgbClr val="F7F7F9"/>
-                    </a:solidFill>
-                  </a:tcPr>
-                </a:tc>
-                <a:tc>
-                  <a:txBody>
-                    <a:bodyPr/>
-                    <a:lstStyle/>
-                    <a:p>
-                      <a:pPr algn="ctr" indent="0" marL="0">
-                        <a:buNone/>
-                      </a:pPr>
-                      <a:r>
-                        <a:rPr lang="en-US" sz="1100" dirty="0">
-                          <a:solidFill>
-                            <a:srgbClr val="333333"/>
-                          </a:solidFill>
-                          <a:latin typeface="Noto Sans TC Medium" pitchFamily="34" charset="0"/>
-                          <a:ea typeface="Noto Sans TC Medium" pitchFamily="34" charset="-122"/>
-                          <a:cs typeface="Noto Sans TC Medium" pitchFamily="34" charset="-120"/>
-                        </a:rPr>
-                        <a:t>高雄</a:t>
-                      </a:r>
-                      <a:endParaRPr lang="en-US" sz="1100" dirty="0">
-                        <a:latin typeface="Noto Sans TC Medium" charset="0"/>
-                        <a:ea typeface="Noto Sans TC Medium" charset="0"/>
-                        <a:cs typeface="Noto Sans TC Medium" charset="0"/>
-                      </a:endParaRPr>
-                    </a:p>
-                  </a:txBody>
-                  <a:tcPr marL="91440" marR="91440" marT="45720" marB="45720" anchor="ctr">
-                    <a:lnL w="6350" cap="flat" cmpd="sng" algn="ctr">
-                      <a:solidFill>
-                        <a:srgbClr val="E5E5E5"/>
-                      </a:solidFill>
-                      <a:prstDash val="solid"/>
-                      <a:round/>
-                      <a:headEnd type="none" w="med" len="med"/>
-                      <a:tailEnd type="none" w="med" len="med"/>
-                    </a:lnL>
-                    <a:lnR w="6350" cap="flat" cmpd="sng" algn="ctr">
-                      <a:solidFill>
-                        <a:srgbClr val="E5E5E5"/>
-                      </a:solidFill>
-                      <a:prstDash val="solid"/>
-                      <a:round/>
-                      <a:headEnd type="none" w="med" len="med"/>
-                      <a:tailEnd type="none" w="med" len="med"/>
-                    </a:lnR>
-                    <a:lnT w="6350" cap="flat" cmpd="sng" algn="ctr">
-                      <a:solidFill>
-                        <a:srgbClr val="E5E5E5"/>
-                      </a:solidFill>
-                      <a:prstDash val="solid"/>
-                      <a:round/>
-                      <a:headEnd type="none" w="med" len="med"/>
-                      <a:tailEnd type="none" w="med" len="med"/>
-                    </a:lnT>
-                    <a:lnB w="6350" cap="flat" cmpd="sng" algn="ctr">
-                      <a:solidFill>
-                        <a:srgbClr val="E5E5E5"/>
-                      </a:solidFill>
-                      <a:prstDash val="solid"/>
-                      <a:round/>
-                      <a:headEnd type="none" w="med" len="med"/>
-                      <a:tailEnd type="none" w="med" len="med"/>
-                    </a:lnB>
-                    <a:solidFill>
-                      <a:srgbClr val="F7F7F9"/>
-                    </a:solidFill>
-                  </a:tcPr>
-                </a:tc>
-                <a:tc>
-                  <a:txBody>
-                    <a:bodyPr/>
-                    <a:lstStyle/>
-                    <a:p>
-                      <a:pPr algn="l" indent="0" marL="0">
-                        <a:buNone/>
-                      </a:pPr>
-                      <a:r>
-                        <a:rPr lang="en-US" sz="1150" b="1" dirty="0">
-                          <a:solidFill>
-                            <a:srgbClr val="333333"/>
-                          </a:solidFill>
-                          <a:latin typeface="Noto Sans TC Bold" pitchFamily="34" charset="0"/>
-                          <a:ea typeface="Noto Sans TC Bold" pitchFamily="34" charset="-122"/>
-                          <a:cs typeface="Noto Sans TC Bold" pitchFamily="34" charset="-120"/>
-                        </a:rPr>
-                        <a:t>全聯福利中心湖內中山店站</a:t>
-                      </a:r>
-                      <a:endParaRPr lang="en-US" sz="1150" dirty="0">
-                        <a:latin typeface="Noto Sans TC Bold" charset="0"/>
-                        <a:ea typeface="Noto Sans TC Bold" charset="0"/>
-                        <a:cs typeface="Noto Sans TC Bold" charset="0"/>
-                      </a:endParaRPr>
-                    </a:p>
-                  </a:txBody>
-                  <a:tcPr marL="91440" marR="91440" marT="45720" marB="45720" anchor="ctr">
-                    <a:lnL w="6350" cap="flat" cmpd="sng" algn="ctr">
-                      <a:solidFill>
-                        <a:srgbClr val="E5E5E5"/>
-                      </a:solidFill>
-                      <a:prstDash val="solid"/>
-                      <a:round/>
-                      <a:headEnd type="none" w="med" len="med"/>
-                      <a:tailEnd type="none" w="med" len="med"/>
-                    </a:lnL>
-                    <a:lnR w="6350" cap="flat" cmpd="sng" algn="ctr">
-                      <a:solidFill>
-                        <a:srgbClr val="E5E5E5"/>
-                      </a:solidFill>
-                      <a:prstDash val="solid"/>
-                      <a:round/>
-                      <a:headEnd type="none" w="med" len="med"/>
-                      <a:tailEnd type="none" w="med" len="med"/>
-                    </a:lnR>
-                    <a:lnT w="6350" cap="flat" cmpd="sng" algn="ctr">
-                      <a:solidFill>
-                        <a:srgbClr val="E5E5E5"/>
-                      </a:solidFill>
-                      <a:prstDash val="solid"/>
-                      <a:round/>
-                      <a:headEnd type="none" w="med" len="med"/>
-                      <a:tailEnd type="none" w="med" len="med"/>
-                    </a:lnT>
-                    <a:lnB w="6350" cap="flat" cmpd="sng" algn="ctr">
-                      <a:solidFill>
-                        <a:srgbClr val="E5E5E5"/>
-                      </a:solidFill>
-                      <a:prstDash val="solid"/>
-                      <a:round/>
-                      <a:headEnd type="none" w="med" len="med"/>
-                      <a:tailEnd type="none" w="med" len="med"/>
-                    </a:lnB>
-                    <a:solidFill>
-                      <a:srgbClr val="F7F7F9"/>
-                    </a:solidFill>
-                  </a:tcPr>
-                </a:tc>
-                <a:tc>
-                  <a:txBody>
-                    <a:bodyPr/>
-                    <a:lstStyle/>
-                    <a:p>
-                      <a:pPr algn="ctr" indent="0" marL="0">
-                        <a:buNone/>
-                      </a:pPr>
-                      <a:r>
-                        <a:rPr lang="en-US" sz="1200" b="1" dirty="0">
-                          <a:solidFill>
-                            <a:srgbClr val="0076A9"/>
-                          </a:solidFill>
-                          <a:latin typeface="Noto Sans TC Bold" pitchFamily="34" charset="0"/>
-                          <a:ea typeface="Noto Sans TC Bold" pitchFamily="34" charset="-122"/>
-                          <a:cs typeface="Noto Sans TC Bold" pitchFamily="34" charset="-120"/>
-                        </a:rPr>
-                        <a:t>1,689</a:t>
-                      </a:r>
-                      <a:endParaRPr lang="en-US" sz="1200" dirty="0">
-                        <a:latin typeface="Noto Sans TC Bold" charset="0"/>
-                        <a:ea typeface="Noto Sans TC Bold" charset="0"/>
-                        <a:cs typeface="Noto Sans TC Bold" charset="0"/>
-                      </a:endParaRPr>
-                    </a:p>
-                  </a:txBody>
-                  <a:tcPr marL="91440" marR="91440" marT="45720" marB="45720" anchor="ctr">
-                    <a:lnL w="6350" cap="flat" cmpd="sng" algn="ctr">
-                      <a:solidFill>
-                        <a:srgbClr val="E5E5E5"/>
-                      </a:solidFill>
-                      <a:prstDash val="solid"/>
-                      <a:round/>
-                      <a:headEnd type="none" w="med" len="med"/>
-                      <a:tailEnd type="none" w="med" len="med"/>
-                    </a:lnL>
-                    <a:lnR w="6350" cap="flat" cmpd="sng" algn="ctr">
-                      <a:solidFill>
-                        <a:srgbClr val="E5E5E5"/>
-                      </a:solidFill>
-                      <a:prstDash val="solid"/>
-                      <a:round/>
-                      <a:headEnd type="none" w="med" len="med"/>
-                      <a:tailEnd type="none" w="med" len="med"/>
-                    </a:lnR>
-                    <a:lnT w="6350" cap="flat" cmpd="sng" algn="ctr">
-                      <a:solidFill>
-                        <a:srgbClr val="E5E5E5"/>
-                      </a:solidFill>
-                      <a:prstDash val="solid"/>
-                      <a:round/>
-                      <a:headEnd type="none" w="med" len="med"/>
-                      <a:tailEnd type="none" w="med" len="med"/>
-                    </a:lnT>
-                    <a:lnB w="6350" cap="flat" cmpd="sng" algn="ctr">
-                      <a:solidFill>
-                        <a:srgbClr val="E5E5E5"/>
-                      </a:solidFill>
-                      <a:prstDash val="solid"/>
-                      <a:round/>
-                      <a:headEnd type="none" w="med" len="med"/>
-                      <a:tailEnd type="none" w="med" len="med"/>
-                    </a:lnB>
-                    <a:solidFill>
-                      <a:srgbClr val="F7F7F9"/>
-                    </a:solidFill>
-                  </a:tcPr>
-                </a:tc>
-                <a:tc>
-                  <a:txBody>
-                    <a:bodyPr/>
-                    <a:lstStyle/>
-                    <a:p>
-                      <a:pPr algn="ctr" indent="0" marL="0">
-                        <a:buNone/>
-                      </a:pPr>
-                      <a:r>
-                        <a:rPr lang="en-US" sz="950" dirty="0">
-                          <a:solidFill>
-                            <a:srgbClr val="888888"/>
-                          </a:solidFill>
-                          <a:latin typeface="Noto Sans TC Medium" pitchFamily="34" charset="0"/>
-                          <a:ea typeface="Noto Sans TC Medium" pitchFamily="34" charset="-122"/>
-                          <a:cs typeface="Noto Sans TC Medium" pitchFamily="34" charset="-120"/>
-                        </a:rPr>
-                        <a:t>－（首次記錄）</a:t>
-                      </a:r>
-                      <a:endParaRPr lang="en-US" sz="950" dirty="0">
-                        <a:latin typeface="Noto Sans TC Medium" charset="0"/>
-                        <a:ea typeface="Noto Sans TC Medium" charset="0"/>
-                        <a:cs typeface="Noto Sans TC Medium" charset="0"/>
-                      </a:endParaRPr>
-                    </a:p>
-                  </a:txBody>
-                  <a:tcPr marL="91440" marR="91440" marT="45720" marB="45720" anchor="ctr">
-                    <a:lnL w="6350" cap="flat" cmpd="sng" algn="ctr">
-                      <a:solidFill>
-                        <a:srgbClr val="E5E5E5"/>
-                      </a:solidFill>
-                      <a:prstDash val="solid"/>
-                      <a:round/>
-                      <a:headEnd type="none" w="med" len="med"/>
-                      <a:tailEnd type="none" w="med" len="med"/>
-                    </a:lnL>
-                    <a:lnR w="6350" cap="flat" cmpd="sng" algn="ctr">
-                      <a:solidFill>
-                        <a:srgbClr val="E5E5E5"/>
-                      </a:solidFill>
-                      <a:prstDash val="solid"/>
-                      <a:round/>
-                      <a:headEnd type="none" w="med" len="med"/>
-                      <a:tailEnd type="none" w="med" len="med"/>
-                    </a:lnR>
-                    <a:lnT w="6350" cap="flat" cmpd="sng" algn="ctr">
-                      <a:solidFill>
-                        <a:srgbClr val="E5E5E5"/>
-                      </a:solidFill>
-                      <a:prstDash val="solid"/>
-                      <a:round/>
-                      <a:headEnd type="none" w="med" len="med"/>
-                      <a:tailEnd type="none" w="med" len="med"/>
-                    </a:lnT>
-                    <a:lnB w="6350" cap="flat" cmpd="sng" algn="ctr">
-                      <a:solidFill>
-                        <a:srgbClr val="E5E5E5"/>
-                      </a:solidFill>
-                      <a:prstDash val="solid"/>
-                      <a:round/>
-                      <a:headEnd type="none" w="med" len="med"/>
-                      <a:tailEnd type="none" w="med" len="med"/>
-                    </a:lnB>
-                    <a:solidFill>
-                      <a:srgbClr val="F7F7F9"/>
-                    </a:solidFill>
-                  </a:tcPr>
-                </a:tc>
-              </a:tr>
-              <a:tr h="384048">
-                <a:tc>
-                  <a:txBody>
-                    <a:bodyPr/>
-                    <a:lstStyle/>
-                    <a:p>
-                      <a:pPr algn="ctr" indent="0" marL="0">
-                        <a:buNone/>
-                      </a:pPr>
-                      <a:r>
-                        <a:rPr lang="en-US" sz="1400" b="1" dirty="0">
-                          <a:solidFill>
-                            <a:srgbClr val="888888"/>
-                          </a:solidFill>
-                          <a:latin typeface="Noto Sans TC Black" pitchFamily="34" charset="0"/>
-                          <a:ea typeface="Noto Sans TC Black" pitchFamily="34" charset="-122"/>
-                          <a:cs typeface="Noto Sans TC Black" pitchFamily="34" charset="-120"/>
-                        </a:rPr>
-                        <a:t>C</a:t>
-                      </a:r>
-                      <a:endParaRPr lang="en-US" sz="1400" dirty="0">
-                        <a:latin typeface="Noto Sans TC Black" charset="0"/>
-                        <a:ea typeface="Noto Sans TC Black" charset="0"/>
-                        <a:cs typeface="Noto Sans TC Black" charset="0"/>
-                      </a:endParaRPr>
-                    </a:p>
-                  </a:txBody>
-                  <a:tcPr marL="91440" marR="91440" marT="45720" marB="45720" anchor="ctr">
-                    <a:lnL w="6350" cap="flat" cmpd="sng" algn="ctr">
-                      <a:solidFill>
-                        <a:srgbClr val="E5E5E5"/>
-                      </a:solidFill>
-                      <a:prstDash val="solid"/>
-                      <a:round/>
-                      <a:headEnd type="none" w="med" len="med"/>
-                      <a:tailEnd type="none" w="med" len="med"/>
-                    </a:lnL>
-                    <a:lnR w="6350" cap="flat" cmpd="sng" algn="ctr">
-                      <a:solidFill>
-                        <a:srgbClr val="E5E5E5"/>
-                      </a:solidFill>
-                      <a:prstDash val="solid"/>
-                      <a:round/>
-                      <a:headEnd type="none" w="med" len="med"/>
-                      <a:tailEnd type="none" w="med" len="med"/>
-                    </a:lnR>
-                    <a:lnT w="6350" cap="flat" cmpd="sng" algn="ctr">
-                      <a:solidFill>
-                        <a:srgbClr val="E5E5E5"/>
-                      </a:solidFill>
-                      <a:prstDash val="solid"/>
-                      <a:round/>
-                      <a:headEnd type="none" w="med" len="med"/>
-                      <a:tailEnd type="none" w="med" len="med"/>
-                    </a:lnT>
-                    <a:lnB w="6350" cap="flat" cmpd="sng" algn="ctr">
-                      <a:solidFill>
-                        <a:srgbClr val="E5E5E5"/>
-                      </a:solidFill>
-                      <a:prstDash val="solid"/>
-                      <a:round/>
-                      <a:headEnd type="none" w="med" len="med"/>
-                      <a:tailEnd type="none" w="med" len="med"/>
-                    </a:lnB>
-                    <a:solidFill>
-                      <a:srgbClr val="FFFFFF"/>
-                    </a:solidFill>
-                  </a:tcPr>
-                </a:tc>
-                <a:tc>
-                  <a:txBody>
-                    <a:bodyPr/>
-                    <a:lstStyle/>
-                    <a:p>
-                      <a:pPr algn="ctr" indent="0" marL="0">
-                        <a:buNone/>
-                      </a:pPr>
-                      <a:r>
-                        <a:rPr lang="en-US" sz="1050" dirty="0">
-                          <a:solidFill>
-                            <a:srgbClr val="888888"/>
-                          </a:solidFill>
-                          <a:latin typeface="Noto Sans TC Medium" pitchFamily="34" charset="0"/>
-                          <a:ea typeface="Noto Sans TC Medium" pitchFamily="34" charset="-122"/>
-                          <a:cs typeface="Noto Sans TC Medium" pitchFamily="34" charset="-120"/>
-                        </a:rPr>
-                        <a:t>第 504 名</a:t>
-                      </a:r>
-                      <a:endParaRPr lang="en-US" sz="1050" dirty="0">
-                        <a:latin typeface="Noto Sans TC Medium" charset="0"/>
-                        <a:ea typeface="Noto Sans TC Medium" charset="0"/>
-                        <a:cs typeface="Noto Sans TC Medium" charset="0"/>
-                      </a:endParaRPr>
-                    </a:p>
-                  </a:txBody>
-                  <a:tcPr marL="91440" marR="91440" marT="45720" marB="45720" anchor="ctr">
-                    <a:lnL w="6350" cap="flat" cmpd="sng" algn="ctr">
-                      <a:solidFill>
-                        <a:srgbClr val="E5E5E5"/>
-                      </a:solidFill>
-                      <a:prstDash val="solid"/>
-                      <a:round/>
-                      <a:headEnd type="none" w="med" len="med"/>
-                      <a:tailEnd type="none" w="med" len="med"/>
-                    </a:lnL>
-                    <a:lnR w="6350" cap="flat" cmpd="sng" algn="ctr">
-                      <a:solidFill>
-                        <a:srgbClr val="E5E5E5"/>
-                      </a:solidFill>
-                      <a:prstDash val="solid"/>
-                      <a:round/>
-                      <a:headEnd type="none" w="med" len="med"/>
-                      <a:tailEnd type="none" w="med" len="med"/>
-                    </a:lnR>
-                    <a:lnT w="6350" cap="flat" cmpd="sng" algn="ctr">
-                      <a:solidFill>
-                        <a:srgbClr val="E5E5E5"/>
-                      </a:solidFill>
-                      <a:prstDash val="solid"/>
-                      <a:round/>
-                      <a:headEnd type="none" w="med" len="med"/>
-                      <a:tailEnd type="none" w="med" len="med"/>
-                    </a:lnT>
-                    <a:lnB w="6350" cap="flat" cmpd="sng" algn="ctr">
-                      <a:solidFill>
-                        <a:srgbClr val="E5E5E5"/>
-                      </a:solidFill>
-                      <a:prstDash val="solid"/>
-                      <a:round/>
-                      <a:headEnd type="none" w="med" len="med"/>
-                      <a:tailEnd type="none" w="med" len="med"/>
-                    </a:lnB>
-                    <a:solidFill>
-                      <a:srgbClr val="FFFFFF"/>
-                    </a:solidFill>
-                  </a:tcPr>
-                </a:tc>
-                <a:tc>
-                  <a:txBody>
-                    <a:bodyPr/>
-                    <a:lstStyle/>
-                    <a:p>
-                      <a:pPr algn="ctr" indent="0" marL="0">
-                        <a:buNone/>
-                      </a:pPr>
-                      <a:r>
-                        <a:rPr lang="en-US" sz="1100" dirty="0">
-                          <a:solidFill>
-                            <a:srgbClr val="333333"/>
-                          </a:solidFill>
-                          <a:latin typeface="Noto Sans TC Medium" pitchFamily="34" charset="0"/>
-                          <a:ea typeface="Noto Sans TC Medium" pitchFamily="34" charset="-122"/>
-                          <a:cs typeface="Noto Sans TC Medium" pitchFamily="34" charset="-120"/>
-                        </a:rPr>
-                        <a:t>臺南</a:t>
-                      </a:r>
-                      <a:endParaRPr lang="en-US" sz="1100" dirty="0">
-                        <a:latin typeface="Noto Sans TC Medium" charset="0"/>
-                        <a:ea typeface="Noto Sans TC Medium" charset="0"/>
-                        <a:cs typeface="Noto Sans TC Medium" charset="0"/>
-                      </a:endParaRPr>
-                    </a:p>
-                  </a:txBody>
-                  <a:tcPr marL="91440" marR="91440" marT="45720" marB="45720" anchor="ctr">
-                    <a:lnL w="6350" cap="flat" cmpd="sng" algn="ctr">
-                      <a:solidFill>
-                        <a:srgbClr val="E5E5E5"/>
-                      </a:solidFill>
-                      <a:prstDash val="solid"/>
-                      <a:round/>
-                      <a:headEnd type="none" w="med" len="med"/>
-                      <a:tailEnd type="none" w="med" len="med"/>
-                    </a:lnL>
-                    <a:lnR w="6350" cap="flat" cmpd="sng" algn="ctr">
-                      <a:solidFill>
-                        <a:srgbClr val="E5E5E5"/>
-                      </a:solidFill>
-                      <a:prstDash val="solid"/>
-                      <a:round/>
-                      <a:headEnd type="none" w="med" len="med"/>
-                      <a:tailEnd type="none" w="med" len="med"/>
-                    </a:lnR>
-                    <a:lnT w="6350" cap="flat" cmpd="sng" algn="ctr">
-                      <a:solidFill>
-                        <a:srgbClr val="E5E5E5"/>
-                      </a:solidFill>
-                      <a:prstDash val="solid"/>
-                      <a:round/>
-                      <a:headEnd type="none" w="med" len="med"/>
-                      <a:tailEnd type="none" w="med" len="med"/>
-                    </a:lnT>
-                    <a:lnB w="6350" cap="flat" cmpd="sng" algn="ctr">
-                      <a:solidFill>
-                        <a:srgbClr val="E5E5E5"/>
-                      </a:solidFill>
-                      <a:prstDash val="solid"/>
-                      <a:round/>
-                      <a:headEnd type="none" w="med" len="med"/>
-                      <a:tailEnd type="none" w="med" len="med"/>
-                    </a:lnB>
-                    <a:solidFill>
-                      <a:srgbClr val="FFFFFF"/>
-                    </a:solidFill>
-                  </a:tcPr>
-                </a:tc>
-                <a:tc>
-                  <a:txBody>
-                    <a:bodyPr/>
-                    <a:lstStyle/>
-                    <a:p>
-                      <a:pPr algn="l" indent="0" marL="0">
-                        <a:buNone/>
-                      </a:pPr>
-                      <a:r>
-                        <a:rPr lang="en-US" sz="1150" b="1" dirty="0">
-                          <a:solidFill>
-                            <a:srgbClr val="333333"/>
-                          </a:solidFill>
-                          <a:latin typeface="Noto Sans TC Bold" pitchFamily="34" charset="0"/>
-                          <a:ea typeface="Noto Sans TC Bold" pitchFamily="34" charset="-122"/>
-                          <a:cs typeface="Noto Sans TC Bold" pitchFamily="34" charset="-120"/>
-                        </a:rPr>
-                        <a:t>成功大學生物科技教學大樓站</a:t>
-                      </a:r>
-                      <a:endParaRPr lang="en-US" sz="1150" dirty="0">
-                        <a:latin typeface="Noto Sans TC Bold" charset="0"/>
-                        <a:ea typeface="Noto Sans TC Bold" charset="0"/>
-                        <a:cs typeface="Noto Sans TC Bold" charset="0"/>
-                      </a:endParaRPr>
-                    </a:p>
-                  </a:txBody>
-                  <a:tcPr marL="91440" marR="91440" marT="45720" marB="45720" anchor="ctr">
-                    <a:lnL w="6350" cap="flat" cmpd="sng" algn="ctr">
-                      <a:solidFill>
-                        <a:srgbClr val="E5E5E5"/>
-                      </a:solidFill>
-                      <a:prstDash val="solid"/>
-                      <a:round/>
-                      <a:headEnd type="none" w="med" len="med"/>
-                      <a:tailEnd type="none" w="med" len="med"/>
-                    </a:lnL>
-                    <a:lnR w="6350" cap="flat" cmpd="sng" algn="ctr">
-                      <a:solidFill>
-                        <a:srgbClr val="E5E5E5"/>
-                      </a:solidFill>
-                      <a:prstDash val="solid"/>
-                      <a:round/>
-                      <a:headEnd type="none" w="med" len="med"/>
-                      <a:tailEnd type="none" w="med" len="med"/>
-                    </a:lnR>
-                    <a:lnT w="6350" cap="flat" cmpd="sng" algn="ctr">
-                      <a:solidFill>
-                        <a:srgbClr val="E5E5E5"/>
-                      </a:solidFill>
-                      <a:prstDash val="solid"/>
-                      <a:round/>
-                      <a:headEnd type="none" w="med" len="med"/>
-                      <a:tailEnd type="none" w="med" len="med"/>
-                    </a:lnT>
-                    <a:lnB w="6350" cap="flat" cmpd="sng" algn="ctr">
-                      <a:solidFill>
-                        <a:srgbClr val="E5E5E5"/>
-                      </a:solidFill>
-                      <a:prstDash val="solid"/>
-                      <a:round/>
-                      <a:headEnd type="none" w="med" len="med"/>
-                      <a:tailEnd type="none" w="med" len="med"/>
-                    </a:lnB>
-                    <a:solidFill>
-                      <a:srgbClr val="FFFFFF"/>
-                    </a:solidFill>
-                  </a:tcPr>
-                </a:tc>
-                <a:tc>
-                  <a:txBody>
-                    <a:bodyPr/>
-                    <a:lstStyle/>
-                    <a:p>
-                      <a:pPr algn="ctr" indent="0" marL="0">
-                        <a:buNone/>
-                      </a:pPr>
-                      <a:r>
-                        <a:rPr lang="en-US" sz="1200" b="1" dirty="0">
-                          <a:solidFill>
-                            <a:srgbClr val="0076A9"/>
-                          </a:solidFill>
-                          <a:latin typeface="Noto Sans TC Bold" pitchFamily="34" charset="0"/>
-                          <a:ea typeface="Noto Sans TC Bold" pitchFamily="34" charset="-122"/>
-                          <a:cs typeface="Noto Sans TC Bold" pitchFamily="34" charset="-120"/>
-                        </a:rPr>
-                        <a:t>1,718</a:t>
-                      </a:r>
-                      <a:endParaRPr lang="en-US" sz="1200" dirty="0">
-                        <a:latin typeface="Noto Sans TC Bold" charset="0"/>
-                        <a:ea typeface="Noto Sans TC Bold" charset="0"/>
-                        <a:cs typeface="Noto Sans TC Bold" charset="0"/>
-                      </a:endParaRPr>
-                    </a:p>
-                  </a:txBody>
-                  <a:tcPr marL="91440" marR="91440" marT="45720" marB="45720" anchor="ctr">
-                    <a:lnL w="6350" cap="flat" cmpd="sng" algn="ctr">
-                      <a:solidFill>
-                        <a:srgbClr val="E5E5E5"/>
-                      </a:solidFill>
-                      <a:prstDash val="solid"/>
-                      <a:round/>
-                      <a:headEnd type="none" w="med" len="med"/>
-                      <a:tailEnd type="none" w="med" len="med"/>
-                    </a:lnL>
-                    <a:lnR w="6350" cap="flat" cmpd="sng" algn="ctr">
-                      <a:solidFill>
-                        <a:srgbClr val="E5E5E5"/>
-                      </a:solidFill>
-                      <a:prstDash val="solid"/>
-                      <a:round/>
-                      <a:headEnd type="none" w="med" len="med"/>
-                      <a:tailEnd type="none" w="med" len="med"/>
-                    </a:lnR>
-                    <a:lnT w="6350" cap="flat" cmpd="sng" algn="ctr">
-                      <a:solidFill>
-                        <a:srgbClr val="E5E5E5"/>
-                      </a:solidFill>
-                      <a:prstDash val="solid"/>
-                      <a:round/>
-                      <a:headEnd type="none" w="med" len="med"/>
-                      <a:tailEnd type="none" w="med" len="med"/>
-                    </a:lnT>
-                    <a:lnB w="6350" cap="flat" cmpd="sng" algn="ctr">
-                      <a:solidFill>
-                        <a:srgbClr val="E5E5E5"/>
-                      </a:solidFill>
-                      <a:prstDash val="solid"/>
-                      <a:round/>
-                      <a:headEnd type="none" w="med" len="med"/>
-                      <a:tailEnd type="none" w="med" len="med"/>
-                    </a:lnB>
-                    <a:solidFill>
-                      <a:srgbClr val="FFFFFF"/>
-                    </a:solidFill>
-                  </a:tcPr>
-                </a:tc>
-                <a:tc>
-                  <a:txBody>
-                    <a:bodyPr/>
-                    <a:lstStyle/>
-                    <a:p>
-                      <a:pPr algn="ctr" indent="0" marL="0">
-                        <a:buNone/>
-                      </a:pPr>
-                      <a:r>
-                        <a:rPr lang="en-US" sz="950" dirty="0">
-                          <a:solidFill>
-                            <a:srgbClr val="888888"/>
-                          </a:solidFill>
-                          <a:latin typeface="Noto Sans TC Medium" pitchFamily="34" charset="0"/>
-                          <a:ea typeface="Noto Sans TC Medium" pitchFamily="34" charset="-122"/>
-                          <a:cs typeface="Noto Sans TC Medium" pitchFamily="34" charset="-120"/>
-                        </a:rPr>
-                        <a:t>－（首次記錄）</a:t>
-                      </a:r>
-                      <a:endParaRPr lang="en-US" sz="950" dirty="0">
-                        <a:latin typeface="Noto Sans TC Medium" charset="0"/>
-                        <a:ea typeface="Noto Sans TC Medium" charset="0"/>
-                        <a:cs typeface="Noto Sans TC Medium" charset="0"/>
-                      </a:endParaRPr>
-                    </a:p>
-                  </a:txBody>
-                  <a:tcPr marL="91440" marR="91440" marT="45720" marB="45720" anchor="ctr">
-                    <a:lnL w="6350" cap="flat" cmpd="sng" algn="ctr">
-                      <a:solidFill>
-                        <a:srgbClr val="E5E5E5"/>
-                      </a:solidFill>
-                      <a:prstDash val="solid"/>
-                      <a:round/>
-                      <a:headEnd type="none" w="med" len="med"/>
-                      <a:tailEnd type="none" w="med" len="med"/>
-                    </a:lnL>
-                    <a:lnR w="6350" cap="flat" cmpd="sng" algn="ctr">
-                      <a:solidFill>
-                        <a:srgbClr val="E5E5E5"/>
-                      </a:solidFill>
-                      <a:prstDash val="solid"/>
-                      <a:round/>
-                      <a:headEnd type="none" w="med" len="med"/>
-                      <a:tailEnd type="none" w="med" len="med"/>
-                    </a:lnR>
-                    <a:lnT w="6350" cap="flat" cmpd="sng" algn="ctr">
-                      <a:solidFill>
-                        <a:srgbClr val="E5E5E5"/>
-                      </a:solidFill>
-                      <a:prstDash val="solid"/>
-                      <a:round/>
-                      <a:headEnd type="none" w="med" len="med"/>
-                      <a:tailEnd type="none" w="med" len="med"/>
-                    </a:lnT>
-                    <a:lnB w="6350" cap="flat" cmpd="sng" algn="ctr">
-                      <a:solidFill>
-                        <a:srgbClr val="E5E5E5"/>
-                      </a:solidFill>
-                      <a:prstDash val="solid"/>
-                      <a:round/>
-                      <a:headEnd type="none" w="med" len="med"/>
-                      <a:tailEnd type="none" w="med" len="med"/>
-                    </a:lnB>
-                    <a:solidFill>
-                      <a:srgbClr val="FFFFFF"/>
-                    </a:solidFill>
-                  </a:tcPr>
-                </a:tc>
-              </a:tr>
-              <a:tr h="384048">
-                <a:tc>
-                  <a:txBody>
-                    <a:bodyPr/>
-                    <a:lstStyle/>
-                    <a:p>
-                      <a:pPr algn="ctr" indent="0" marL="0">
-                        <a:buNone/>
-                      </a:pPr>
-                      <a:r>
-                        <a:rPr lang="en-US" sz="1400" b="1" dirty="0">
-                          <a:solidFill>
-                            <a:srgbClr val="888888"/>
-                          </a:solidFill>
-                          <a:latin typeface="Noto Sans TC Black" pitchFamily="34" charset="0"/>
-                          <a:ea typeface="Noto Sans TC Black" pitchFamily="34" charset="-122"/>
-                          <a:cs typeface="Noto Sans TC Black" pitchFamily="34" charset="-120"/>
-                        </a:rPr>
-                        <a:t>C</a:t>
-                      </a:r>
-                      <a:endParaRPr lang="en-US" sz="1400" dirty="0">
-                        <a:latin typeface="Noto Sans TC Black" charset="0"/>
-                        <a:ea typeface="Noto Sans TC Black" charset="0"/>
-                        <a:cs typeface="Noto Sans TC Black" charset="0"/>
-                      </a:endParaRPr>
-                    </a:p>
-                  </a:txBody>
-                  <a:tcPr marL="91440" marR="91440" marT="45720" marB="45720" anchor="ctr">
-                    <a:lnL w="6350" cap="flat" cmpd="sng" algn="ctr">
-                      <a:solidFill>
-                        <a:srgbClr val="E5E5E5"/>
-                      </a:solidFill>
-                      <a:prstDash val="solid"/>
-                      <a:round/>
-                      <a:headEnd type="none" w="med" len="med"/>
-                      <a:tailEnd type="none" w="med" len="med"/>
-                    </a:lnL>
-                    <a:lnR w="6350" cap="flat" cmpd="sng" algn="ctr">
-                      <a:solidFill>
-                        <a:srgbClr val="E5E5E5"/>
-                      </a:solidFill>
-                      <a:prstDash val="solid"/>
-                      <a:round/>
-                      <a:headEnd type="none" w="med" len="med"/>
-                      <a:tailEnd type="none" w="med" len="med"/>
-                    </a:lnR>
-                    <a:lnT w="6350" cap="flat" cmpd="sng" algn="ctr">
-                      <a:solidFill>
-                        <a:srgbClr val="E5E5E5"/>
-                      </a:solidFill>
-                      <a:prstDash val="solid"/>
-                      <a:round/>
-                      <a:headEnd type="none" w="med" len="med"/>
-                      <a:tailEnd type="none" w="med" len="med"/>
-                    </a:lnT>
-                    <a:lnB w="6350" cap="flat" cmpd="sng" algn="ctr">
-                      <a:solidFill>
-                        <a:srgbClr val="E5E5E5"/>
-                      </a:solidFill>
-                      <a:prstDash val="solid"/>
-                      <a:round/>
-                      <a:headEnd type="none" w="med" len="med"/>
-                      <a:tailEnd type="none" w="med" len="med"/>
-                    </a:lnB>
-                    <a:solidFill>
-                      <a:srgbClr val="F7F7F9"/>
-                    </a:solidFill>
-                  </a:tcPr>
-                </a:tc>
-                <a:tc>
-                  <a:txBody>
-                    <a:bodyPr/>
-                    <a:lstStyle/>
-                    <a:p>
-                      <a:pPr algn="ctr" indent="0" marL="0">
-                        <a:buNone/>
-                      </a:pPr>
-                      <a:r>
-                        <a:rPr lang="en-US" sz="1050" dirty="0">
-                          <a:solidFill>
-                            <a:srgbClr val="888888"/>
-                          </a:solidFill>
-                          <a:latin typeface="Noto Sans TC Medium" pitchFamily="34" charset="0"/>
-                          <a:ea typeface="Noto Sans TC Medium" pitchFamily="34" charset="-122"/>
-                          <a:cs typeface="Noto Sans TC Medium" pitchFamily="34" charset="-120"/>
-                        </a:rPr>
-                        <a:t>第 556 名</a:t>
+                        <a:t>第 372 名</a:t>
                       </a:r>
                       <a:endParaRPr lang="en-US" sz="1050" dirty="0">
                         <a:latin typeface="Noto Sans TC Medium" charset="0"/>
@@ -12223,7 +12223,7 @@
                           <a:ea typeface="Noto Sans TC Bold" pitchFamily="34" charset="-122"/>
                           <a:cs typeface="Noto Sans TC Bold" pitchFamily="34" charset="-120"/>
                         </a:rPr>
-                        <a:t>全聯福利中心彰化田中店站</a:t>
+                        <a:t>全家員林正新店站</a:t>
                       </a:r>
                       <a:endParaRPr lang="en-US" sz="1150" dirty="0">
                         <a:latin typeface="Noto Sans TC Bold" charset="0"/>
@@ -12291,7 +12291,7 @@
                           <a:ea typeface="Noto Sans TC Bold" pitchFamily="34" charset="-122"/>
                           <a:cs typeface="Noto Sans TC Bold" pitchFamily="34" charset="-120"/>
                         </a:rPr>
-                        <a:t>1,748</a:t>
+                        <a:t>7,066</a:t>
                       </a:r>
                       <a:endParaRPr lang="en-US" sz="1200" dirty="0">
                         <a:latin typeface="Noto Sans TC Bold" charset="0"/>
@@ -12478,7 +12478,7 @@
                 <a:ea typeface="Noto Sans TC Medium" pitchFamily="34" charset="-122"/>
                 <a:cs typeface="Noto Sans TC Medium" pitchFamily="34" charset="-120"/>
               </a:rPr>
-              <a:t>資料來源：Hive，站點貢獻程度以月回收量分級(最近 30 天塑膠＋鋁罐回收量)（前34%是A，中間33%是B，後面33%是C）。</a:t>
+              <a:t>資料來源：Hive，站點貢獻程度以月回收量分級(最近 30 天塑膠＋鋁罐回收量) (前34%是A,中間33%是B,後面33%是C)</a:t>
             </a:r>
             <a:endParaRPr lang="en-US" sz="950" dirty="0"/>
           </a:p>
